--- a/260418_add/supplefigure_260420/SuppFig_S05_GSEA_full.pptx
+++ b/260418_add/supplefigure_260420/SuppFig_S05_GSEA_full.pptx
@@ -3156,83 +3156,99 @@
                 </a:solidFill>
                 <a:latin typeface="Arial"/>
               </a:rPr>
-              <a:t>Hallmark GSEA NES × −log10(FDR) — all 50 sets, pre-CRT good vs bad (n = 33)</a:t>
-            </a:r>
-          </a:p>
-        </p:txBody>
-      </p:sp>
-      <p:cxnSp>
-        <p:nvCxnSpPr>
-          <p:cNvPr id="4" name="Connector 3"/>
-          <p:cNvCxnSpPr/>
-          <p:nvPr/>
-        </p:nvCxnSpPr>
-        <p:spPr>
-          <a:xfrm>
-            <a:off x="1371600" y="5943600"/>
-            <a:ext cx="10058400" cy="0"/>
-          </a:xfrm>
-          <a:prstGeom prst="line">
-            <a:avLst/>
-          </a:prstGeom>
-          <a:ln w="12700">
-            <a:solidFill>
-              <a:srgbClr val="222222"/>
-            </a:solidFill>
-          </a:ln>
-          <a:effectLst/>
-        </p:spPr>
-        <p:style>
-          <a:lnRef idx="2">
-            <a:schemeClr val="accent1"/>
-          </a:lnRef>
-          <a:fillRef idx="0">
-            <a:schemeClr val="accent1"/>
-          </a:fillRef>
-          <a:effectRef idx="1">
-            <a:schemeClr val="accent1"/>
-          </a:effectRef>
-          <a:fontRef idx="minor">
-            <a:schemeClr val="tx1"/>
-          </a:fontRef>
-        </p:style>
-      </p:cxnSp>
-      <p:cxnSp>
-        <p:nvCxnSpPr>
-          <p:cNvPr id="5" name="Connector 4"/>
-          <p:cNvCxnSpPr/>
-          <p:nvPr/>
-        </p:nvCxnSpPr>
-        <p:spPr>
-          <a:xfrm>
-            <a:off x="1371600" y="1188720"/>
-            <a:ext cx="0" cy="4754880"/>
-          </a:xfrm>
-          <a:prstGeom prst="line">
-            <a:avLst/>
-          </a:prstGeom>
-          <a:ln w="12700">
-            <a:solidFill>
-              <a:srgbClr val="222222"/>
-            </a:solidFill>
-          </a:ln>
-          <a:effectLst/>
-        </p:spPr>
-        <p:style>
-          <a:lnRef idx="2">
-            <a:schemeClr val="accent1"/>
-          </a:lnRef>
-          <a:fillRef idx="0">
-            <a:schemeClr val="accent1"/>
-          </a:fillRef>
-          <a:effectRef idx="1">
-            <a:schemeClr val="accent1"/>
-          </a:effectRef>
-          <a:fontRef idx="minor">
-            <a:schemeClr val="tx1"/>
-          </a:fontRef>
-        </p:style>
-      </p:cxnSp>
+              <a:t>Hallmark GSEA NES × −log10(FDR) — all 50 sets (category-band background; FDR 0.05 gold ref)</a:t>
+            </a:r>
+          </a:p>
+        </p:txBody>
+      </p:sp>
+      <p:sp>
+        <p:nvSpPr>
+          <p:cNvPr id="4" name="Rectangle 3"/>
+          <p:cNvSpPr/>
+          <p:nvPr/>
+        </p:nvSpPr>
+        <p:spPr>
+          <a:xfrm>
+            <a:off x="1371600" y="1170432"/>
+            <a:ext cx="4447854" cy="4773168"/>
+          </a:xfrm>
+          <a:prstGeom prst="rect">
+            <a:avLst/>
+          </a:prstGeom>
+          <a:solidFill>
+            <a:srgbClr val="FAF2EE"/>
+          </a:solidFill>
+          <a:ln>
+            <a:noFill/>
+          </a:ln>
+          <a:effectLst/>
+        </p:spPr>
+        <p:style>
+          <a:lnRef idx="1">
+            <a:schemeClr val="accent1"/>
+          </a:lnRef>
+          <a:fillRef idx="3">
+            <a:schemeClr val="accent1"/>
+          </a:fillRef>
+          <a:effectRef idx="2">
+            <a:schemeClr val="accent1"/>
+          </a:effectRef>
+          <a:fontRef idx="minor">
+            <a:schemeClr val="lt1"/>
+          </a:fontRef>
+        </p:style>
+        <p:txBody>
+          <a:bodyPr rtlCol="0" anchor="ctr"/>
+          <a:lstStyle/>
+          <a:p>
+            <a:pPr algn="ctr"/>
+          </a:p>
+        </p:txBody>
+      </p:sp>
+      <p:sp>
+        <p:nvSpPr>
+          <p:cNvPr id="5" name="Rectangle 4"/>
+          <p:cNvSpPr/>
+          <p:nvPr/>
+        </p:nvSpPr>
+        <p:spPr>
+          <a:xfrm>
+            <a:off x="5819454" y="1170432"/>
+            <a:ext cx="5610546" cy="4773168"/>
+          </a:xfrm>
+          <a:prstGeom prst="rect">
+            <a:avLst/>
+          </a:prstGeom>
+          <a:solidFill>
+            <a:srgbClr val="EEF7F4"/>
+          </a:solidFill>
+          <a:ln>
+            <a:noFill/>
+          </a:ln>
+          <a:effectLst/>
+        </p:spPr>
+        <p:style>
+          <a:lnRef idx="1">
+            <a:schemeClr val="accent1"/>
+          </a:lnRef>
+          <a:fillRef idx="3">
+            <a:schemeClr val="accent1"/>
+          </a:fillRef>
+          <a:effectRef idx="2">
+            <a:schemeClr val="accent1"/>
+          </a:effectRef>
+          <a:fontRef idx="minor">
+            <a:schemeClr val="lt1"/>
+          </a:fontRef>
+        </p:style>
+        <p:txBody>
+          <a:bodyPr rtlCol="0" anchor="ctr"/>
+          <a:lstStyle/>
+          <a:p>
+            <a:pPr algn="ctr"/>
+          </a:p>
+        </p:txBody>
+      </p:sp>
       <p:cxnSp>
         <p:nvCxnSpPr>
           <p:cNvPr id="6" name="Connector 5"/>
@@ -3241,15 +3257,15 @@
         </p:nvCxnSpPr>
         <p:spPr>
           <a:xfrm>
-            <a:off x="11430000" y="1188720"/>
-            <a:ext cx="0" cy="4754880"/>
+            <a:off x="1371600" y="5943600"/>
+            <a:ext cx="10058400" cy="0"/>
           </a:xfrm>
           <a:prstGeom prst="line">
             <a:avLst/>
           </a:prstGeom>
-          <a:ln w="6350">
-            <a:solidFill>
-              <a:srgbClr val="DDDDDD"/>
+          <a:ln w="12700">
+            <a:solidFill>
+              <a:srgbClr val="222222"/>
             </a:solidFill>
           </a:ln>
           <a:effectLst/>
@@ -3278,14 +3294,14 @@
         <p:spPr>
           <a:xfrm>
             <a:off x="1371600" y="1188720"/>
-            <a:ext cx="10058400" cy="0"/>
+            <a:ext cx="0" cy="4754880"/>
           </a:xfrm>
           <a:prstGeom prst="line">
             <a:avLst/>
           </a:prstGeom>
-          <a:ln w="6350">
-            <a:solidFill>
-              <a:srgbClr val="DDDDDD"/>
+          <a:ln w="12700">
+            <a:solidFill>
+              <a:srgbClr val="222222"/>
             </a:solidFill>
           </a:ln>
           <a:effectLst/>
@@ -3313,6 +3329,78 @@
         </p:nvCxnSpPr>
         <p:spPr>
           <a:xfrm>
+            <a:off x="11430000" y="1188720"/>
+            <a:ext cx="0" cy="4754880"/>
+          </a:xfrm>
+          <a:prstGeom prst="line">
+            <a:avLst/>
+          </a:prstGeom>
+          <a:ln w="6350">
+            <a:solidFill>
+              <a:srgbClr val="DDDDDD"/>
+            </a:solidFill>
+          </a:ln>
+          <a:effectLst/>
+        </p:spPr>
+        <p:style>
+          <a:lnRef idx="2">
+            <a:schemeClr val="accent1"/>
+          </a:lnRef>
+          <a:fillRef idx="0">
+            <a:schemeClr val="accent1"/>
+          </a:fillRef>
+          <a:effectRef idx="1">
+            <a:schemeClr val="accent1"/>
+          </a:effectRef>
+          <a:fontRef idx="minor">
+            <a:schemeClr val="tx1"/>
+          </a:fontRef>
+        </p:style>
+      </p:cxnSp>
+      <p:cxnSp>
+        <p:nvCxnSpPr>
+          <p:cNvPr id="9" name="Connector 8"/>
+          <p:cNvCxnSpPr/>
+          <p:nvPr/>
+        </p:nvCxnSpPr>
+        <p:spPr>
+          <a:xfrm>
+            <a:off x="1371600" y="1188720"/>
+            <a:ext cx="10058400" cy="0"/>
+          </a:xfrm>
+          <a:prstGeom prst="line">
+            <a:avLst/>
+          </a:prstGeom>
+          <a:ln w="6350">
+            <a:solidFill>
+              <a:srgbClr val="DDDDDD"/>
+            </a:solidFill>
+          </a:ln>
+          <a:effectLst/>
+        </p:spPr>
+        <p:style>
+          <a:lnRef idx="2">
+            <a:schemeClr val="accent1"/>
+          </a:lnRef>
+          <a:fillRef idx="0">
+            <a:schemeClr val="accent1"/>
+          </a:fillRef>
+          <a:effectRef idx="1">
+            <a:schemeClr val="accent1"/>
+          </a:effectRef>
+          <a:fontRef idx="minor">
+            <a:schemeClr val="tx1"/>
+          </a:fontRef>
+        </p:style>
+      </p:cxnSp>
+      <p:cxnSp>
+        <p:nvCxnSpPr>
+          <p:cNvPr id="10" name="Connector 9"/>
+          <p:cNvCxnSpPr/>
+          <p:nvPr/>
+        </p:nvCxnSpPr>
+        <p:spPr>
+          <a:xfrm>
             <a:off x="1307592" y="5943600"/>
             <a:ext cx="64008" cy="0"/>
           </a:xfrm>
@@ -3343,7 +3431,7 @@
       </p:cxnSp>
       <p:sp>
         <p:nvSpPr>
-          <p:cNvPr id="9" name="TextBox 8"/>
+          <p:cNvPr id="11" name="TextBox 10"/>
           <p:cNvSpPr txBox="1"/>
           <p:nvPr/>
         </p:nvSpPr>
@@ -3379,7 +3467,7 @@
       </p:sp>
       <p:cxnSp>
         <p:nvCxnSpPr>
-          <p:cNvPr id="10" name="Connector 9"/>
+          <p:cNvPr id="12" name="Connector 11"/>
           <p:cNvCxnSpPr/>
           <p:nvPr/>
         </p:nvCxnSpPr>
@@ -3415,7 +3503,7 @@
       </p:cxnSp>
       <p:sp>
         <p:nvSpPr>
-          <p:cNvPr id="11" name="TextBox 10"/>
+          <p:cNvPr id="13" name="TextBox 12"/>
           <p:cNvSpPr txBox="1"/>
           <p:nvPr/>
         </p:nvSpPr>
@@ -3451,7 +3539,7 @@
       </p:sp>
       <p:cxnSp>
         <p:nvCxnSpPr>
-          <p:cNvPr id="12" name="Connector 11"/>
+          <p:cNvPr id="14" name="Connector 13"/>
           <p:cNvCxnSpPr/>
           <p:nvPr/>
         </p:nvCxnSpPr>
@@ -3487,7 +3575,7 @@
       </p:cxnSp>
       <p:sp>
         <p:nvSpPr>
-          <p:cNvPr id="13" name="TextBox 12"/>
+          <p:cNvPr id="15" name="TextBox 14"/>
           <p:cNvSpPr txBox="1"/>
           <p:nvPr/>
         </p:nvSpPr>
@@ -3523,7 +3611,7 @@
       </p:sp>
       <p:cxnSp>
         <p:nvCxnSpPr>
-          <p:cNvPr id="14" name="Connector 13"/>
+          <p:cNvPr id="16" name="Connector 15"/>
           <p:cNvCxnSpPr/>
           <p:nvPr/>
         </p:nvCxnSpPr>
@@ -3559,7 +3647,7 @@
       </p:cxnSp>
       <p:sp>
         <p:nvSpPr>
-          <p:cNvPr id="15" name="TextBox 14"/>
+          <p:cNvPr id="17" name="TextBox 16"/>
           <p:cNvSpPr txBox="1"/>
           <p:nvPr/>
         </p:nvSpPr>
@@ -3595,7 +3683,7 @@
       </p:sp>
       <p:cxnSp>
         <p:nvCxnSpPr>
-          <p:cNvPr id="16" name="Connector 15"/>
+          <p:cNvPr id="18" name="Connector 17"/>
           <p:cNvCxnSpPr/>
           <p:nvPr/>
         </p:nvCxnSpPr>
@@ -3631,7 +3719,7 @@
       </p:cxnSp>
       <p:sp>
         <p:nvSpPr>
-          <p:cNvPr id="17" name="TextBox 16"/>
+          <p:cNvPr id="19" name="TextBox 18"/>
           <p:cNvSpPr txBox="1"/>
           <p:nvPr/>
         </p:nvSpPr>
@@ -3667,7 +3755,7 @@
       </p:sp>
       <p:cxnSp>
         <p:nvCxnSpPr>
-          <p:cNvPr id="18" name="Connector 17"/>
+          <p:cNvPr id="20" name="Connector 19"/>
           <p:cNvCxnSpPr/>
           <p:nvPr/>
         </p:nvCxnSpPr>
@@ -3703,7 +3791,7 @@
       </p:cxnSp>
       <p:sp>
         <p:nvSpPr>
-          <p:cNvPr id="19" name="TextBox 18"/>
+          <p:cNvPr id="21" name="TextBox 20"/>
           <p:cNvSpPr txBox="1"/>
           <p:nvPr/>
         </p:nvSpPr>
@@ -3739,7 +3827,7 @@
       </p:sp>
       <p:cxnSp>
         <p:nvCxnSpPr>
-          <p:cNvPr id="20" name="Connector 19"/>
+          <p:cNvPr id="22" name="Connector 21"/>
           <p:cNvCxnSpPr/>
           <p:nvPr/>
         </p:nvCxnSpPr>
@@ -3775,7 +3863,7 @@
       </p:cxnSp>
       <p:sp>
         <p:nvSpPr>
-          <p:cNvPr id="21" name="TextBox 20"/>
+          <p:cNvPr id="23" name="TextBox 22"/>
           <p:cNvSpPr txBox="1"/>
           <p:nvPr/>
         </p:nvSpPr>
@@ -3811,7 +3899,7 @@
       </p:sp>
       <p:cxnSp>
         <p:nvCxnSpPr>
-          <p:cNvPr id="22" name="Connector 21"/>
+          <p:cNvPr id="24" name="Connector 23"/>
           <p:cNvCxnSpPr/>
           <p:nvPr/>
         </p:nvCxnSpPr>
@@ -3847,7 +3935,7 @@
       </p:cxnSp>
       <p:sp>
         <p:nvSpPr>
-          <p:cNvPr id="23" name="TextBox 22"/>
+          <p:cNvPr id="25" name="TextBox 24"/>
           <p:cNvSpPr txBox="1"/>
           <p:nvPr/>
         </p:nvSpPr>
@@ -3883,7 +3971,7 @@
       </p:sp>
       <p:cxnSp>
         <p:nvCxnSpPr>
-          <p:cNvPr id="24" name="Connector 23"/>
+          <p:cNvPr id="26" name="Connector 25"/>
           <p:cNvCxnSpPr/>
           <p:nvPr/>
         </p:nvCxnSpPr>
@@ -3919,7 +4007,7 @@
       </p:cxnSp>
       <p:sp>
         <p:nvSpPr>
-          <p:cNvPr id="25" name="TextBox 24"/>
+          <p:cNvPr id="27" name="TextBox 26"/>
           <p:cNvSpPr txBox="1"/>
           <p:nvPr/>
         </p:nvSpPr>
@@ -3955,7 +4043,7 @@
       </p:sp>
       <p:cxnSp>
         <p:nvCxnSpPr>
-          <p:cNvPr id="26" name="Connector 25"/>
+          <p:cNvPr id="28" name="Connector 27"/>
           <p:cNvCxnSpPr/>
           <p:nvPr/>
         </p:nvCxnSpPr>
@@ -3991,7 +4079,7 @@
       </p:cxnSp>
       <p:sp>
         <p:nvSpPr>
-          <p:cNvPr id="27" name="TextBox 26"/>
+          <p:cNvPr id="29" name="TextBox 28"/>
           <p:cNvSpPr txBox="1"/>
           <p:nvPr/>
         </p:nvSpPr>
@@ -4027,7 +4115,7 @@
       </p:sp>
       <p:cxnSp>
         <p:nvCxnSpPr>
-          <p:cNvPr id="28" name="Connector 27"/>
+          <p:cNvPr id="30" name="Connector 29"/>
           <p:cNvCxnSpPr/>
           <p:nvPr/>
         </p:nvCxnSpPr>
@@ -4063,7 +4151,7 @@
       </p:cxnSp>
       <p:sp>
         <p:nvSpPr>
-          <p:cNvPr id="29" name="TextBox 28"/>
+          <p:cNvPr id="31" name="TextBox 30"/>
           <p:cNvSpPr txBox="1"/>
           <p:nvPr/>
         </p:nvSpPr>
@@ -4099,7 +4187,7 @@
       </p:sp>
       <p:sp>
         <p:nvSpPr>
-          <p:cNvPr id="30" name="TextBox 29"/>
+          <p:cNvPr id="32" name="TextBox 31"/>
           <p:cNvSpPr txBox="1"/>
           <p:nvPr/>
         </p:nvSpPr>
@@ -4128,14 +4216,14 @@
                 </a:solidFill>
                 <a:latin typeface="Arial"/>
               </a:rPr>
-              <a:t>Normalized Enrichment Score (NES)  —  left = bad-enriched, right = good-enriched</a:t>
-            </a:r>
-          </a:p>
-        </p:txBody>
-      </p:sp>
-      <p:sp>
-        <p:nvSpPr>
-          <p:cNvPr id="31" name="TextBox 30"/>
+              <a:t>Normalized Enrichment Score (NES)  —  left = bad-enriched · right = good-enriched</a:t>
+            </a:r>
+          </a:p>
+        </p:txBody>
+      </p:sp>
+      <p:sp>
+        <p:nvSpPr>
+          <p:cNvPr id="33" name="TextBox 32"/>
           <p:cNvSpPr txBox="1"/>
           <p:nvPr/>
         </p:nvSpPr>
@@ -4171,7 +4259,7 @@
       </p:sp>
       <p:cxnSp>
         <p:nvCxnSpPr>
-          <p:cNvPr id="32" name="Connector 31"/>
+          <p:cNvPr id="34" name="Connector 33"/>
           <p:cNvCxnSpPr/>
           <p:nvPr/>
         </p:nvCxnSpPr>
@@ -4183,11 +4271,10 @@
           <a:prstGeom prst="line">
             <a:avLst/>
           </a:prstGeom>
-          <a:ln w="6350">
-            <a:solidFill>
-              <a:srgbClr val="BBBBBB"/>
-            </a:solidFill>
-            <a:prstDash val="dash"/>
+          <a:ln w="12700">
+            <a:solidFill>
+              <a:srgbClr val="222222"/>
+            </a:solidFill>
           </a:ln>
           <a:effectLst/>
         </p:spPr>
@@ -4208,7 +4295,7 @@
       </p:cxnSp>
       <p:cxnSp>
         <p:nvCxnSpPr>
-          <p:cNvPr id="33" name="Connector 32"/>
+          <p:cNvPr id="35" name="Connector 34"/>
           <p:cNvCxnSpPr/>
           <p:nvPr/>
         </p:nvCxnSpPr>
@@ -4220,7 +4307,7 @@
           <a:prstGeom prst="line">
             <a:avLst/>
           </a:prstGeom>
-          <a:ln w="7620">
+          <a:ln w="12700">
             <a:solidFill>
               <a:srgbClr val="D4A300"/>
             </a:solidFill>
@@ -4245,14 +4332,60 @@
       </p:cxnSp>
       <p:sp>
         <p:nvSpPr>
-          <p:cNvPr id="34" name="TextBox 33"/>
+          <p:cNvPr id="36" name="Rectangle 35"/>
+          <p:cNvSpPr/>
+          <p:nvPr/>
+        </p:nvSpPr>
+        <p:spPr>
+          <a:xfrm>
+            <a:off x="9784080" y="5547788"/>
+            <a:ext cx="1600200" cy="274320"/>
+          </a:xfrm>
+          <a:prstGeom prst="rect">
+            <a:avLst/>
+          </a:prstGeom>
+          <a:solidFill>
+            <a:srgbClr val="D4A300"/>
+          </a:solidFill>
+          <a:ln w="10160">
+            <a:solidFill>
+              <a:srgbClr val="222222"/>
+            </a:solidFill>
+          </a:ln>
+          <a:effectLst/>
+        </p:spPr>
+        <p:style>
+          <a:lnRef idx="1">
+            <a:schemeClr val="accent1"/>
+          </a:lnRef>
+          <a:fillRef idx="3">
+            <a:schemeClr val="accent1"/>
+          </a:fillRef>
+          <a:effectRef idx="2">
+            <a:schemeClr val="accent1"/>
+          </a:effectRef>
+          <a:fontRef idx="minor">
+            <a:schemeClr val="lt1"/>
+          </a:fontRef>
+        </p:style>
+        <p:txBody>
+          <a:bodyPr rtlCol="0" anchor="ctr"/>
+          <a:lstStyle/>
+          <a:p>
+            <a:pPr algn="ctr"/>
+          </a:p>
+        </p:txBody>
+      </p:sp>
+      <p:sp>
+        <p:nvSpPr>
+          <p:cNvPr id="37" name="TextBox 36"/>
           <p:cNvSpPr txBox="1"/>
           <p:nvPr/>
         </p:nvSpPr>
         <p:spPr>
           <a:xfrm>
-            <a:off x="10698480" y="5502068"/>
-            <a:ext cx="640080" cy="164592"/>
+            <a:off x="9784080" y="5547788"/>
+            <a:ext cx="1600200" cy="274320"/>
           </a:xfrm>
           <a:prstGeom prst="rect">
             <a:avLst/>
@@ -4266,29 +4399,73 @@
           </a:bodyPr>
           <a:lstStyle/>
           <a:p>
-            <a:pPr algn="l"/>
-            <a:r>
-              <a:rPr sz="700" b="0" i="0">
+            <a:pPr algn="ctr"/>
+            <a:r>
+              <a:rPr sz="900" b="1" i="0">
                 <a:solidFill>
-                  <a:srgbClr val="D4A300"/>
+                  <a:srgbClr val="222222"/>
                 </a:solidFill>
                 <a:latin typeface="Arial"/>
               </a:rPr>
-              <a:t>FDR 0.05</a:t>
-            </a:r>
-          </a:p>
-        </p:txBody>
-      </p:sp>
-      <p:sp>
-        <p:nvSpPr>
-          <p:cNvPr id="35" name="Oval 34"/>
+              <a:t>FDR 0.05 threshold</a:t>
+            </a:r>
+          </a:p>
+        </p:txBody>
+      </p:sp>
+      <p:sp>
+        <p:nvSpPr>
+          <p:cNvPr id="38" name="Oval 37"/>
           <p:cNvSpPr/>
           <p:nvPr/>
         </p:nvSpPr>
         <p:spPr>
           <a:xfrm>
-            <a:off x="10888422" y="1456390"/>
-            <a:ext cx="329184" cy="329184"/>
+            <a:off x="10851846" y="1419814"/>
+            <a:ext cx="402336" cy="402336"/>
+          </a:xfrm>
+          <a:prstGeom prst="ellipse">
+            <a:avLst/>
+          </a:prstGeom>
+          <a:noFill/>
+          <a:ln w="19050">
+            <a:solidFill>
+              <a:srgbClr val="D4A300"/>
+            </a:solidFill>
+          </a:ln>
+          <a:effectLst/>
+        </p:spPr>
+        <p:style>
+          <a:lnRef idx="1">
+            <a:schemeClr val="accent1"/>
+          </a:lnRef>
+          <a:fillRef idx="3">
+            <a:schemeClr val="accent1"/>
+          </a:fillRef>
+          <a:effectRef idx="2">
+            <a:schemeClr val="accent1"/>
+          </a:effectRef>
+          <a:fontRef idx="minor">
+            <a:schemeClr val="lt1"/>
+          </a:fontRef>
+        </p:style>
+        <p:txBody>
+          <a:bodyPr rtlCol="0" anchor="ctr"/>
+          <a:lstStyle/>
+          <a:p>
+            <a:pPr algn="ctr"/>
+          </a:p>
+        </p:txBody>
+      </p:sp>
+      <p:sp>
+        <p:nvSpPr>
+          <p:cNvPr id="39" name="Oval 38"/>
+          <p:cNvSpPr/>
+          <p:nvPr/>
+        </p:nvSpPr>
+        <p:spPr>
+          <a:xfrm>
+            <a:off x="10897566" y="1465534"/>
+            <a:ext cx="310896" cy="310896"/>
           </a:xfrm>
           <a:prstGeom prst="ellipse">
             <a:avLst/>
@@ -4327,14 +4504,14 @@
       </p:sp>
       <p:sp>
         <p:nvSpPr>
-          <p:cNvPr id="36" name="TextBox 35"/>
+          <p:cNvPr id="40" name="TextBox 39"/>
           <p:cNvSpPr txBox="1"/>
           <p:nvPr/>
         </p:nvSpPr>
         <p:spPr>
           <a:xfrm>
-            <a:off x="11126166" y="1511254"/>
-            <a:ext cx="2286000" cy="182880"/>
+            <a:off x="11144454" y="1520398"/>
+            <a:ext cx="2194560" cy="182880"/>
           </a:xfrm>
           <a:prstGeom prst="rect">
             <a:avLst/>
@@ -4350,7 +4527,7 @@
           <a:p>
             <a:pPr algn="l"/>
             <a:r>
-              <a:rPr sz="600" b="1" i="0">
+              <a:rPr sz="700" b="1" i="0">
                 <a:solidFill>
                   <a:srgbClr val="0A7D6E"/>
                 </a:solidFill>
@@ -4363,14 +4540,58 @@
       </p:sp>
       <p:sp>
         <p:nvSpPr>
-          <p:cNvPr id="37" name="Oval 36"/>
+          <p:cNvPr id="41" name="Oval 40"/>
           <p:cNvSpPr/>
           <p:nvPr/>
         </p:nvSpPr>
         <p:spPr>
           <a:xfrm>
-            <a:off x="10292916" y="3312363"/>
-            <a:ext cx="325892" cy="325892"/>
+            <a:off x="10256340" y="3275787"/>
+            <a:ext cx="399044" cy="399044"/>
+          </a:xfrm>
+          <a:prstGeom prst="ellipse">
+            <a:avLst/>
+          </a:prstGeom>
+          <a:noFill/>
+          <a:ln w="19050">
+            <a:solidFill>
+              <a:srgbClr val="D4A300"/>
+            </a:solidFill>
+          </a:ln>
+          <a:effectLst/>
+        </p:spPr>
+        <p:style>
+          <a:lnRef idx="1">
+            <a:schemeClr val="accent1"/>
+          </a:lnRef>
+          <a:fillRef idx="3">
+            <a:schemeClr val="accent1"/>
+          </a:fillRef>
+          <a:effectRef idx="2">
+            <a:schemeClr val="accent1"/>
+          </a:effectRef>
+          <a:fontRef idx="minor">
+            <a:schemeClr val="lt1"/>
+          </a:fontRef>
+        </p:style>
+        <p:txBody>
+          <a:bodyPr rtlCol="0" anchor="ctr"/>
+          <a:lstStyle/>
+          <a:p>
+            <a:pPr algn="ctr"/>
+          </a:p>
+        </p:txBody>
+      </p:sp>
+      <p:sp>
+        <p:nvSpPr>
+          <p:cNvPr id="42" name="Oval 41"/>
+          <p:cNvSpPr/>
+          <p:nvPr/>
+        </p:nvSpPr>
+        <p:spPr>
+          <a:xfrm>
+            <a:off x="10302060" y="3321507"/>
+            <a:ext cx="307604" cy="307604"/>
           </a:xfrm>
           <a:prstGeom prst="ellipse">
             <a:avLst/>
@@ -4409,14 +4630,14 @@
       </p:sp>
       <p:sp>
         <p:nvSpPr>
-          <p:cNvPr id="38" name="TextBox 37"/>
+          <p:cNvPr id="43" name="TextBox 42"/>
           <p:cNvSpPr txBox="1"/>
           <p:nvPr/>
         </p:nvSpPr>
         <p:spPr>
           <a:xfrm>
-            <a:off x="10529014" y="3365581"/>
-            <a:ext cx="2286000" cy="182880"/>
+            <a:off x="10547302" y="3374725"/>
+            <a:ext cx="2194560" cy="182880"/>
           </a:xfrm>
           <a:prstGeom prst="rect">
             <a:avLst/>
@@ -4432,7 +4653,7 @@
           <a:p>
             <a:pPr algn="l"/>
             <a:r>
-              <a:rPr sz="600" b="1" i="0">
+              <a:rPr sz="700" b="1" i="0">
                 <a:solidFill>
                   <a:srgbClr val="0A7D6E"/>
                 </a:solidFill>
@@ -4445,14 +4666,58 @@
       </p:sp>
       <p:sp>
         <p:nvSpPr>
-          <p:cNvPr id="39" name="Oval 38"/>
+          <p:cNvPr id="44" name="Oval 43"/>
           <p:cNvSpPr/>
           <p:nvPr/>
         </p:nvSpPr>
         <p:spPr>
           <a:xfrm>
-            <a:off x="10103833" y="3613506"/>
-            <a:ext cx="328086" cy="328086"/>
+            <a:off x="10067257" y="3576930"/>
+            <a:ext cx="401238" cy="401238"/>
+          </a:xfrm>
+          <a:prstGeom prst="ellipse">
+            <a:avLst/>
+          </a:prstGeom>
+          <a:noFill/>
+          <a:ln w="19050">
+            <a:solidFill>
+              <a:srgbClr val="D4A300"/>
+            </a:solidFill>
+          </a:ln>
+          <a:effectLst/>
+        </p:spPr>
+        <p:style>
+          <a:lnRef idx="1">
+            <a:schemeClr val="accent1"/>
+          </a:lnRef>
+          <a:fillRef idx="3">
+            <a:schemeClr val="accent1"/>
+          </a:fillRef>
+          <a:effectRef idx="2">
+            <a:schemeClr val="accent1"/>
+          </a:effectRef>
+          <a:fontRef idx="minor">
+            <a:schemeClr val="lt1"/>
+          </a:fontRef>
+        </p:style>
+        <p:txBody>
+          <a:bodyPr rtlCol="0" anchor="ctr"/>
+          <a:lstStyle/>
+          <a:p>
+            <a:pPr algn="ctr"/>
+          </a:p>
+        </p:txBody>
+      </p:sp>
+      <p:sp>
+        <p:nvSpPr>
+          <p:cNvPr id="45" name="Oval 44"/>
+          <p:cNvSpPr/>
+          <p:nvPr/>
+        </p:nvSpPr>
+        <p:spPr>
+          <a:xfrm>
+            <a:off x="10112977" y="3622650"/>
+            <a:ext cx="309798" cy="309798"/>
           </a:xfrm>
           <a:prstGeom prst="ellipse">
             <a:avLst/>
@@ -4491,14 +4756,14 @@
       </p:sp>
       <p:sp>
         <p:nvSpPr>
-          <p:cNvPr id="40" name="TextBox 39"/>
+          <p:cNvPr id="46" name="TextBox 45"/>
           <p:cNvSpPr txBox="1"/>
           <p:nvPr/>
         </p:nvSpPr>
         <p:spPr>
           <a:xfrm>
-            <a:off x="10341028" y="3667821"/>
-            <a:ext cx="2286000" cy="182880"/>
+            <a:off x="10359316" y="3676965"/>
+            <a:ext cx="2194560" cy="182880"/>
           </a:xfrm>
           <a:prstGeom prst="rect">
             <a:avLst/>
@@ -4514,7 +4779,7 @@
           <a:p>
             <a:pPr algn="l"/>
             <a:r>
-              <a:rPr sz="600" b="1" i="0">
+              <a:rPr sz="700" b="1" i="0">
                 <a:solidFill>
                   <a:srgbClr val="0A7D6E"/>
                 </a:solidFill>
@@ -4527,14 +4792,58 @@
       </p:sp>
       <p:sp>
         <p:nvSpPr>
-          <p:cNvPr id="41" name="Oval 40"/>
+          <p:cNvPr id="47" name="Oval 46"/>
           <p:cNvSpPr/>
           <p:nvPr/>
         </p:nvSpPr>
         <p:spPr>
           <a:xfrm>
-            <a:off x="1614718" y="4309615"/>
-            <a:ext cx="267736" cy="267736"/>
+            <a:off x="1578142" y="4273039"/>
+            <a:ext cx="340888" cy="340888"/>
+          </a:xfrm>
+          <a:prstGeom prst="ellipse">
+            <a:avLst/>
+          </a:prstGeom>
+          <a:noFill/>
+          <a:ln w="19050">
+            <a:solidFill>
+              <a:srgbClr val="D4A300"/>
+            </a:solidFill>
+          </a:ln>
+          <a:effectLst/>
+        </p:spPr>
+        <p:style>
+          <a:lnRef idx="1">
+            <a:schemeClr val="accent1"/>
+          </a:lnRef>
+          <a:fillRef idx="3">
+            <a:schemeClr val="accent1"/>
+          </a:fillRef>
+          <a:effectRef idx="2">
+            <a:schemeClr val="accent1"/>
+          </a:effectRef>
+          <a:fontRef idx="minor">
+            <a:schemeClr val="lt1"/>
+          </a:fontRef>
+        </p:style>
+        <p:txBody>
+          <a:bodyPr rtlCol="0" anchor="ctr"/>
+          <a:lstStyle/>
+          <a:p>
+            <a:pPr algn="ctr"/>
+          </a:p>
+        </p:txBody>
+      </p:sp>
+      <p:sp>
+        <p:nvSpPr>
+          <p:cNvPr id="48" name="Oval 47"/>
+          <p:cNvSpPr/>
+          <p:nvPr/>
+        </p:nvSpPr>
+        <p:spPr>
+          <a:xfrm>
+            <a:off x="1623862" y="4318759"/>
+            <a:ext cx="249448" cy="249448"/>
           </a:xfrm>
           <a:prstGeom prst="ellipse">
             <a:avLst/>
@@ -4573,14 +4882,14 @@
       </p:sp>
       <p:sp>
         <p:nvSpPr>
-          <p:cNvPr id="42" name="TextBox 41"/>
+          <p:cNvPr id="49" name="TextBox 48"/>
           <p:cNvSpPr txBox="1"/>
           <p:nvPr/>
         </p:nvSpPr>
         <p:spPr>
           <a:xfrm>
-            <a:off x="1821738" y="4333755"/>
-            <a:ext cx="2286000" cy="182880"/>
+            <a:off x="1840026" y="4342899"/>
+            <a:ext cx="2194560" cy="182880"/>
           </a:xfrm>
           <a:prstGeom prst="rect">
             <a:avLst/>
@@ -4596,27 +4905,71 @@
           <a:p>
             <a:pPr algn="l"/>
             <a:r>
-              <a:rPr sz="600" b="1" i="0">
+              <a:rPr sz="700" b="1" i="0">
                 <a:solidFill>
                   <a:srgbClr val="C53E1F"/>
                 </a:solidFill>
                 <a:latin typeface="Arial"/>
               </a:rPr>
-              <a:t>EPITHELIAL_MESENCHYMAL_TRANSITION</a:t>
-            </a:r>
-          </a:p>
-        </p:txBody>
-      </p:sp>
-      <p:sp>
-        <p:nvSpPr>
-          <p:cNvPr id="43" name="Oval 42"/>
+              <a:t>EPITHELIAL_MESENCHYMAL_TR</a:t>
+            </a:r>
+          </a:p>
+        </p:txBody>
+      </p:sp>
+      <p:sp>
+        <p:nvSpPr>
+          <p:cNvPr id="50" name="Oval 49"/>
           <p:cNvSpPr/>
           <p:nvPr/>
         </p:nvSpPr>
         <p:spPr>
           <a:xfrm>
-            <a:off x="9944640" y="4916948"/>
-            <a:ext cx="172272" cy="172272"/>
+            <a:off x="9908064" y="4880372"/>
+            <a:ext cx="245424" cy="245424"/>
+          </a:xfrm>
+          <a:prstGeom prst="ellipse">
+            <a:avLst/>
+          </a:prstGeom>
+          <a:noFill/>
+          <a:ln w="19050">
+            <a:solidFill>
+              <a:srgbClr val="D4A300"/>
+            </a:solidFill>
+          </a:ln>
+          <a:effectLst/>
+        </p:spPr>
+        <p:style>
+          <a:lnRef idx="1">
+            <a:schemeClr val="accent1"/>
+          </a:lnRef>
+          <a:fillRef idx="3">
+            <a:schemeClr val="accent1"/>
+          </a:fillRef>
+          <a:effectRef idx="2">
+            <a:schemeClr val="accent1"/>
+          </a:effectRef>
+          <a:fontRef idx="minor">
+            <a:schemeClr val="lt1"/>
+          </a:fontRef>
+        </p:style>
+        <p:txBody>
+          <a:bodyPr rtlCol="0" anchor="ctr"/>
+          <a:lstStyle/>
+          <a:p>
+            <a:pPr algn="ctr"/>
+          </a:p>
+        </p:txBody>
+      </p:sp>
+      <p:sp>
+        <p:nvSpPr>
+          <p:cNvPr id="51" name="Oval 50"/>
+          <p:cNvSpPr/>
+          <p:nvPr/>
+        </p:nvSpPr>
+        <p:spPr>
+          <a:xfrm>
+            <a:off x="9953784" y="4926092"/>
+            <a:ext cx="153984" cy="153984"/>
           </a:xfrm>
           <a:prstGeom prst="ellipse">
             <a:avLst/>
@@ -4655,14 +5008,14 @@
       </p:sp>
       <p:sp>
         <p:nvSpPr>
-          <p:cNvPr id="44" name="TextBox 43"/>
+          <p:cNvPr id="52" name="TextBox 51"/>
           <p:cNvSpPr txBox="1"/>
           <p:nvPr/>
         </p:nvSpPr>
         <p:spPr>
           <a:xfrm>
-            <a:off x="10103928" y="4893356"/>
-            <a:ext cx="2286000" cy="182880"/>
+            <a:off x="10122216" y="4902500"/>
+            <a:ext cx="2194560" cy="182880"/>
           </a:xfrm>
           <a:prstGeom prst="rect">
             <a:avLst/>
@@ -4678,7 +5031,7 @@
           <a:p>
             <a:pPr algn="l"/>
             <a:r>
-              <a:rPr sz="600" b="1" i="0">
+              <a:rPr sz="700" b="1" i="0">
                 <a:solidFill>
                   <a:srgbClr val="0A7D6E"/>
                 </a:solidFill>
@@ -4691,14 +5044,58 @@
       </p:sp>
       <p:sp>
         <p:nvSpPr>
-          <p:cNvPr id="45" name="Oval 44"/>
+          <p:cNvPr id="53" name="Oval 52"/>
           <p:cNvSpPr/>
           <p:nvPr/>
         </p:nvSpPr>
         <p:spPr>
           <a:xfrm>
-            <a:off x="2307327" y="5088444"/>
-            <a:ext cx="287486" cy="287486"/>
+            <a:off x="2270751" y="5051868"/>
+            <a:ext cx="360638" cy="360638"/>
+          </a:xfrm>
+          <a:prstGeom prst="ellipse">
+            <a:avLst/>
+          </a:prstGeom>
+          <a:noFill/>
+          <a:ln w="19050">
+            <a:solidFill>
+              <a:srgbClr val="D4A300"/>
+            </a:solidFill>
+          </a:ln>
+          <a:effectLst/>
+        </p:spPr>
+        <p:style>
+          <a:lnRef idx="1">
+            <a:schemeClr val="accent1"/>
+          </a:lnRef>
+          <a:fillRef idx="3">
+            <a:schemeClr val="accent1"/>
+          </a:fillRef>
+          <a:effectRef idx="2">
+            <a:schemeClr val="accent1"/>
+          </a:effectRef>
+          <a:fontRef idx="minor">
+            <a:schemeClr val="lt1"/>
+          </a:fontRef>
+        </p:style>
+        <p:txBody>
+          <a:bodyPr rtlCol="0" anchor="ctr"/>
+          <a:lstStyle/>
+          <a:p>
+            <a:pPr algn="ctr"/>
+          </a:p>
+        </p:txBody>
+      </p:sp>
+      <p:sp>
+        <p:nvSpPr>
+          <p:cNvPr id="54" name="Oval 53"/>
+          <p:cNvSpPr/>
+          <p:nvPr/>
+        </p:nvSpPr>
+        <p:spPr>
+          <a:xfrm>
+            <a:off x="2316471" y="5097588"/>
+            <a:ext cx="269198" cy="269198"/>
           </a:xfrm>
           <a:prstGeom prst="ellipse">
             <a:avLst/>
@@ -4737,14 +5134,14 @@
       </p:sp>
       <p:sp>
         <p:nvSpPr>
-          <p:cNvPr id="46" name="TextBox 45"/>
+          <p:cNvPr id="55" name="TextBox 54"/>
           <p:cNvSpPr txBox="1"/>
           <p:nvPr/>
         </p:nvSpPr>
         <p:spPr>
           <a:xfrm>
-            <a:off x="2524222" y="5122459"/>
-            <a:ext cx="2286000" cy="182880"/>
+            <a:off x="2542510" y="5131603"/>
+            <a:ext cx="2194560" cy="182880"/>
           </a:xfrm>
           <a:prstGeom prst="rect">
             <a:avLst/>
@@ -4760,7 +5157,7 @@
           <a:p>
             <a:pPr algn="l"/>
             <a:r>
-              <a:rPr sz="600" b="1" i="0">
+              <a:rPr sz="700" b="1" i="0">
                 <a:solidFill>
                   <a:srgbClr val="C53E1F"/>
                 </a:solidFill>
@@ -4773,14 +5170,58 @@
       </p:sp>
       <p:sp>
         <p:nvSpPr>
-          <p:cNvPr id="47" name="Oval 46"/>
+          <p:cNvPr id="56" name="Oval 55"/>
           <p:cNvSpPr/>
           <p:nvPr/>
         </p:nvSpPr>
         <p:spPr>
           <a:xfrm>
-            <a:off x="8896980" y="5178604"/>
-            <a:ext cx="323696" cy="323696"/>
+            <a:off x="8860404" y="5142028"/>
+            <a:ext cx="396848" cy="396848"/>
+          </a:xfrm>
+          <a:prstGeom prst="ellipse">
+            <a:avLst/>
+          </a:prstGeom>
+          <a:noFill/>
+          <a:ln w="19050">
+            <a:solidFill>
+              <a:srgbClr val="D4A300"/>
+            </a:solidFill>
+          </a:ln>
+          <a:effectLst/>
+        </p:spPr>
+        <p:style>
+          <a:lnRef idx="1">
+            <a:schemeClr val="accent1"/>
+          </a:lnRef>
+          <a:fillRef idx="3">
+            <a:schemeClr val="accent1"/>
+          </a:fillRef>
+          <a:effectRef idx="2">
+            <a:schemeClr val="accent1"/>
+          </a:effectRef>
+          <a:fontRef idx="minor">
+            <a:schemeClr val="lt1"/>
+          </a:fontRef>
+        </p:style>
+        <p:txBody>
+          <a:bodyPr rtlCol="0" anchor="ctr"/>
+          <a:lstStyle/>
+          <a:p>
+            <a:pPr algn="ctr"/>
+          </a:p>
+        </p:txBody>
+      </p:sp>
+      <p:sp>
+        <p:nvSpPr>
+          <p:cNvPr id="57" name="Oval 56"/>
+          <p:cNvSpPr/>
+          <p:nvPr/>
+        </p:nvSpPr>
+        <p:spPr>
+          <a:xfrm>
+            <a:off x="8906124" y="5187748"/>
+            <a:ext cx="305408" cy="305408"/>
           </a:xfrm>
           <a:prstGeom prst="ellipse">
             <a:avLst/>
@@ -4819,14 +5260,14 @@
       </p:sp>
       <p:sp>
         <p:nvSpPr>
-          <p:cNvPr id="48" name="TextBox 47"/>
+          <p:cNvPr id="58" name="TextBox 57"/>
           <p:cNvSpPr txBox="1"/>
           <p:nvPr/>
         </p:nvSpPr>
         <p:spPr>
           <a:xfrm>
-            <a:off x="9131980" y="5230724"/>
-            <a:ext cx="2286000" cy="182880"/>
+            <a:off x="9150268" y="5239868"/>
+            <a:ext cx="2194560" cy="182880"/>
           </a:xfrm>
           <a:prstGeom prst="rect">
             <a:avLst/>
@@ -4842,7 +5283,7 @@
           <a:p>
             <a:pPr algn="l"/>
             <a:r>
-              <a:rPr sz="600" b="1" i="0">
+              <a:rPr sz="700" b="1" i="0">
                 <a:solidFill>
                   <a:srgbClr val="0A7D6E"/>
                 </a:solidFill>
@@ -4855,14 +5296,14 @@
       </p:sp>
       <p:sp>
         <p:nvSpPr>
-          <p:cNvPr id="49" name="Oval 48"/>
+          <p:cNvPr id="59" name="Oval 58"/>
           <p:cNvSpPr/>
           <p:nvPr/>
         </p:nvSpPr>
         <p:spPr>
           <a:xfrm>
-            <a:off x="8617737" y="5363201"/>
-            <a:ext cx="314918" cy="314918"/>
+            <a:off x="8626881" y="5372345"/>
+            <a:ext cx="296630" cy="296630"/>
           </a:xfrm>
           <a:prstGeom prst="ellipse">
             <a:avLst/>
@@ -4901,14 +5342,58 @@
       </p:sp>
       <p:sp>
         <p:nvSpPr>
-          <p:cNvPr id="50" name="Oval 49"/>
+          <p:cNvPr id="60" name="Oval 59"/>
           <p:cNvSpPr/>
           <p:nvPr/>
         </p:nvSpPr>
         <p:spPr>
           <a:xfrm>
-            <a:off x="2892293" y="5488717"/>
-            <a:ext cx="299556" cy="299556"/>
+            <a:off x="2855717" y="5452141"/>
+            <a:ext cx="372708" cy="372708"/>
+          </a:xfrm>
+          <a:prstGeom prst="ellipse">
+            <a:avLst/>
+          </a:prstGeom>
+          <a:noFill/>
+          <a:ln w="19050">
+            <a:solidFill>
+              <a:srgbClr val="D4A300"/>
+            </a:solidFill>
+          </a:ln>
+          <a:effectLst/>
+        </p:spPr>
+        <p:style>
+          <a:lnRef idx="1">
+            <a:schemeClr val="accent1"/>
+          </a:lnRef>
+          <a:fillRef idx="3">
+            <a:schemeClr val="accent1"/>
+          </a:fillRef>
+          <a:effectRef idx="2">
+            <a:schemeClr val="accent1"/>
+          </a:effectRef>
+          <a:fontRef idx="minor">
+            <a:schemeClr val="lt1"/>
+          </a:fontRef>
+        </p:style>
+        <p:txBody>
+          <a:bodyPr rtlCol="0" anchor="ctr"/>
+          <a:lstStyle/>
+          <a:p>
+            <a:pPr algn="ctr"/>
+          </a:p>
+        </p:txBody>
+      </p:sp>
+      <p:sp>
+        <p:nvSpPr>
+          <p:cNvPr id="61" name="Oval 60"/>
+          <p:cNvSpPr/>
+          <p:nvPr/>
+        </p:nvSpPr>
+        <p:spPr>
+          <a:xfrm>
+            <a:off x="2901437" y="5497861"/>
+            <a:ext cx="281268" cy="281268"/>
           </a:xfrm>
           <a:prstGeom prst="ellipse">
             <a:avLst/>
@@ -4947,14 +5432,14 @@
       </p:sp>
       <p:sp>
         <p:nvSpPr>
-          <p:cNvPr id="51" name="TextBox 50"/>
+          <p:cNvPr id="62" name="TextBox 61"/>
           <p:cNvSpPr txBox="1"/>
           <p:nvPr/>
         </p:nvSpPr>
         <p:spPr>
           <a:xfrm>
-            <a:off x="3115223" y="5528767"/>
-            <a:ext cx="2286000" cy="182880"/>
+            <a:off x="3133511" y="5537911"/>
+            <a:ext cx="2194560" cy="182880"/>
           </a:xfrm>
           <a:prstGeom prst="rect">
             <a:avLst/>
@@ -4970,7 +5455,7 @@
           <a:p>
             <a:pPr algn="l"/>
             <a:r>
-              <a:rPr sz="600" b="1" i="0">
+              <a:rPr sz="700" b="1" i="0">
                 <a:solidFill>
                   <a:srgbClr val="C53E1F"/>
                 </a:solidFill>
@@ -4983,14 +5468,14 @@
       </p:sp>
       <p:sp>
         <p:nvSpPr>
-          <p:cNvPr id="52" name="Oval 51"/>
+          <p:cNvPr id="63" name="Oval 62"/>
           <p:cNvSpPr/>
           <p:nvPr/>
         </p:nvSpPr>
         <p:spPr>
           <a:xfrm>
-            <a:off x="8690102" y="5533404"/>
-            <a:ext cx="231526" cy="231526"/>
+            <a:off x="8699246" y="5542548"/>
+            <a:ext cx="213238" cy="213238"/>
           </a:xfrm>
           <a:prstGeom prst="ellipse">
             <a:avLst/>
@@ -5029,50 +5514,14 @@
       </p:sp>
       <p:sp>
         <p:nvSpPr>
-          <p:cNvPr id="53" name="TextBox 52"/>
-          <p:cNvSpPr txBox="1"/>
-          <p:nvPr/>
-        </p:nvSpPr>
-        <p:spPr>
-          <a:xfrm>
-            <a:off x="8879017" y="5539439"/>
-            <a:ext cx="2286000" cy="182880"/>
-          </a:xfrm>
-          <a:prstGeom prst="rect">
-            <a:avLst/>
-          </a:prstGeom>
-          <a:noFill/>
-          <a:effectLst/>
-        </p:spPr>
-        <p:txBody>
-          <a:bodyPr wrap="square" lIns="0" rIns="0" tIns="0" bIns="0" anchor="ctr">
-            <a:spAutoFit/>
-          </a:bodyPr>
-          <a:lstStyle/>
-          <a:p>
-            <a:pPr algn="l"/>
-            <a:r>
-              <a:rPr sz="600" b="1" i="0">
-                <a:solidFill>
-                  <a:srgbClr val="0A7D6E"/>
-                </a:solidFill>
-                <a:latin typeface="Arial"/>
-              </a:rPr>
-              <a:t>UNFOLDED_PROTEIN_RESPONSE</a:t>
-            </a:r>
-          </a:p>
-        </p:txBody>
-      </p:sp>
-      <p:sp>
-        <p:nvSpPr>
-          <p:cNvPr id="54" name="Oval 53"/>
+          <p:cNvPr id="64" name="Oval 63"/>
           <p:cNvSpPr/>
           <p:nvPr/>
         </p:nvSpPr>
         <p:spPr>
           <a:xfrm>
-            <a:off x="3077954" y="5631868"/>
-            <a:ext cx="251276" cy="251276"/>
+            <a:off x="3087098" y="5641012"/>
+            <a:ext cx="232988" cy="232988"/>
           </a:xfrm>
           <a:prstGeom prst="ellipse">
             <a:avLst/>
@@ -5111,14 +5560,14 @@
       </p:sp>
       <p:sp>
         <p:nvSpPr>
-          <p:cNvPr id="55" name="Oval 54"/>
+          <p:cNvPr id="65" name="Oval 64"/>
           <p:cNvSpPr/>
           <p:nvPr/>
         </p:nvSpPr>
         <p:spPr>
           <a:xfrm>
-            <a:off x="3074649" y="5605533"/>
-            <a:ext cx="303946" cy="303946"/>
+            <a:off x="3083793" y="5614677"/>
+            <a:ext cx="285658" cy="285658"/>
           </a:xfrm>
           <a:prstGeom prst="ellipse">
             <a:avLst/>
@@ -5157,14 +5606,14 @@
       </p:sp>
       <p:sp>
         <p:nvSpPr>
-          <p:cNvPr id="56" name="Oval 55"/>
+          <p:cNvPr id="66" name="Oval 65"/>
           <p:cNvSpPr/>
           <p:nvPr/>
         </p:nvSpPr>
         <p:spPr>
           <a:xfrm>
-            <a:off x="3126681" y="5604985"/>
-            <a:ext cx="305042" cy="305042"/>
+            <a:off x="3135825" y="5614129"/>
+            <a:ext cx="286754" cy="286754"/>
           </a:xfrm>
           <a:prstGeom prst="ellipse">
             <a:avLst/>
@@ -5203,14 +5652,14 @@
       </p:sp>
       <p:sp>
         <p:nvSpPr>
-          <p:cNvPr id="57" name="Oval 56"/>
+          <p:cNvPr id="67" name="Oval 66"/>
           <p:cNvSpPr/>
           <p:nvPr/>
         </p:nvSpPr>
         <p:spPr>
           <a:xfrm>
-            <a:off x="3179088" y="5627405"/>
-            <a:ext cx="283098" cy="283098"/>
+            <a:off x="3188232" y="5636549"/>
+            <a:ext cx="264810" cy="264810"/>
           </a:xfrm>
           <a:prstGeom prst="ellipse">
             <a:avLst/>
@@ -5249,14 +5698,14 @@
       </p:sp>
       <p:sp>
         <p:nvSpPr>
-          <p:cNvPr id="58" name="Oval 57"/>
+          <p:cNvPr id="68" name="Oval 67"/>
           <p:cNvSpPr/>
           <p:nvPr/>
         </p:nvSpPr>
         <p:spPr>
           <a:xfrm>
-            <a:off x="3226361" y="5655716"/>
-            <a:ext cx="262248" cy="262248"/>
+            <a:off x="3235505" y="5664860"/>
+            <a:ext cx="243960" cy="243960"/>
           </a:xfrm>
           <a:prstGeom prst="ellipse">
             <a:avLst/>
@@ -5295,14 +5744,14 @@
       </p:sp>
       <p:sp>
         <p:nvSpPr>
-          <p:cNvPr id="59" name="Oval 58"/>
+          <p:cNvPr id="69" name="Oval 68"/>
           <p:cNvSpPr/>
           <p:nvPr/>
         </p:nvSpPr>
         <p:spPr>
           <a:xfrm>
-            <a:off x="2994586" y="5710031"/>
-            <a:ext cx="153618" cy="153618"/>
+            <a:off x="3003730" y="5719175"/>
+            <a:ext cx="135330" cy="135330"/>
           </a:xfrm>
           <a:prstGeom prst="ellipse">
             <a:avLst/>
@@ -5341,50 +5790,14 @@
       </p:sp>
       <p:sp>
         <p:nvSpPr>
-          <p:cNvPr id="60" name="TextBox 59"/>
-          <p:cNvSpPr txBox="1"/>
-          <p:nvPr/>
-        </p:nvSpPr>
-        <p:spPr>
-          <a:xfrm>
-            <a:off x="3144547" y="5677112"/>
-            <a:ext cx="2286000" cy="182880"/>
-          </a:xfrm>
-          <a:prstGeom prst="rect">
-            <a:avLst/>
-          </a:prstGeom>
-          <a:noFill/>
-          <a:effectLst/>
-        </p:spPr>
-        <p:txBody>
-          <a:bodyPr wrap="square" lIns="0" rIns="0" tIns="0" bIns="0" anchor="ctr">
-            <a:spAutoFit/>
-          </a:bodyPr>
-          <a:lstStyle/>
-          <a:p>
-            <a:pPr algn="l"/>
-            <a:r>
-              <a:rPr sz="600" b="1" i="0">
-                <a:solidFill>
-                  <a:srgbClr val="C53E1F"/>
-                </a:solidFill>
-                <a:latin typeface="Arial"/>
-              </a:rPr>
-              <a:t>WNT_BETA_CATENIN_SIGNALING</a:t>
-            </a:r>
-          </a:p>
-        </p:txBody>
-      </p:sp>
-      <p:sp>
-        <p:nvSpPr>
-          <p:cNvPr id="61" name="Oval 60"/>
+          <p:cNvPr id="70" name="Oval 69"/>
           <p:cNvSpPr/>
           <p:nvPr/>
         </p:nvSpPr>
         <p:spPr>
           <a:xfrm>
-            <a:off x="3204972" y="5628284"/>
-            <a:ext cx="317112" cy="317112"/>
+            <a:off x="3214116" y="5637428"/>
+            <a:ext cx="298824" cy="298824"/>
           </a:xfrm>
           <a:prstGeom prst="ellipse">
             <a:avLst/>
@@ -5423,14 +5836,14 @@
       </p:sp>
       <p:sp>
         <p:nvSpPr>
-          <p:cNvPr id="62" name="Oval 61"/>
+          <p:cNvPr id="71" name="Oval 70"/>
           <p:cNvSpPr/>
           <p:nvPr/>
         </p:nvSpPr>
         <p:spPr>
           <a:xfrm>
-            <a:off x="3253421" y="5689728"/>
-            <a:ext cx="212872" cy="212872"/>
+            <a:off x="3262565" y="5698872"/>
+            <a:ext cx="194584" cy="194584"/>
           </a:xfrm>
           <a:prstGeom prst="ellipse">
             <a:avLst/>
@@ -5469,14 +5882,14 @@
       </p:sp>
       <p:sp>
         <p:nvSpPr>
-          <p:cNvPr id="63" name="Oval 62"/>
+          <p:cNvPr id="72" name="Oval 71"/>
           <p:cNvSpPr/>
           <p:nvPr/>
         </p:nvSpPr>
         <p:spPr>
           <a:xfrm>
-            <a:off x="3309145" y="5648564"/>
-            <a:ext cx="300654" cy="300654"/>
+            <a:off x="3318289" y="5657708"/>
+            <a:ext cx="282366" cy="282366"/>
           </a:xfrm>
           <a:prstGeom prst="ellipse">
             <a:avLst/>
@@ -5515,14 +5928,14 @@
       </p:sp>
       <p:sp>
         <p:nvSpPr>
-          <p:cNvPr id="64" name="Oval 63"/>
+          <p:cNvPr id="73" name="Oval 72"/>
           <p:cNvSpPr/>
           <p:nvPr/>
         </p:nvSpPr>
         <p:spPr>
           <a:xfrm>
-            <a:off x="3221395" y="5727996"/>
-            <a:ext cx="163494" cy="163494"/>
+            <a:off x="3230539" y="5737140"/>
+            <a:ext cx="145206" cy="145206"/>
           </a:xfrm>
           <a:prstGeom prst="ellipse">
             <a:avLst/>
@@ -5561,14 +5974,14 @@
       </p:sp>
       <p:sp>
         <p:nvSpPr>
-          <p:cNvPr id="65" name="Oval 64"/>
+          <p:cNvPr id="74" name="Oval 73"/>
           <p:cNvSpPr/>
           <p:nvPr/>
         </p:nvSpPr>
         <p:spPr>
           <a:xfrm>
-            <a:off x="3327338" y="5673681"/>
-            <a:ext cx="272124" cy="272124"/>
+            <a:off x="3336482" y="5682825"/>
+            <a:ext cx="253836" cy="253836"/>
           </a:xfrm>
           <a:prstGeom prst="ellipse">
             <a:avLst/>
@@ -5607,14 +6020,14 @@
       </p:sp>
       <p:sp>
         <p:nvSpPr>
-          <p:cNvPr id="66" name="Oval 65"/>
+          <p:cNvPr id="75" name="Oval 74"/>
           <p:cNvSpPr/>
           <p:nvPr/>
         </p:nvSpPr>
         <p:spPr>
           <a:xfrm>
-            <a:off x="3335782" y="5659416"/>
-            <a:ext cx="300654" cy="300654"/>
+            <a:off x="3344926" y="5668560"/>
+            <a:ext cx="282366" cy="282366"/>
           </a:xfrm>
           <a:prstGeom prst="ellipse">
             <a:avLst/>
@@ -5653,14 +6066,14 @@
       </p:sp>
       <p:sp>
         <p:nvSpPr>
-          <p:cNvPr id="67" name="Oval 66"/>
+          <p:cNvPr id="76" name="Oval 75"/>
           <p:cNvSpPr/>
           <p:nvPr/>
         </p:nvSpPr>
         <p:spPr>
           <a:xfrm>
-            <a:off x="3249571" y="5772622"/>
-            <a:ext cx="139354" cy="139354"/>
+            <a:off x="3258715" y="5781766"/>
+            <a:ext cx="121066" cy="121066"/>
           </a:xfrm>
           <a:prstGeom prst="ellipse">
             <a:avLst/>
@@ -5699,14 +6112,14 @@
       </p:sp>
       <p:sp>
         <p:nvSpPr>
-          <p:cNvPr id="68" name="Oval 67"/>
+          <p:cNvPr id="77" name="Oval 76"/>
           <p:cNvSpPr/>
           <p:nvPr/>
         </p:nvSpPr>
         <p:spPr>
           <a:xfrm>
-            <a:off x="3469670" y="5704711"/>
-            <a:ext cx="282000" cy="282000"/>
+            <a:off x="3478814" y="5713855"/>
+            <a:ext cx="263712" cy="263712"/>
           </a:xfrm>
           <a:prstGeom prst="ellipse">
             <a:avLst/>
@@ -5745,14 +6158,14 @@
       </p:sp>
       <p:sp>
         <p:nvSpPr>
-          <p:cNvPr id="69" name="Oval 68"/>
+          <p:cNvPr id="78" name="Oval 77"/>
           <p:cNvSpPr/>
           <p:nvPr/>
         </p:nvSpPr>
         <p:spPr>
           <a:xfrm>
-            <a:off x="3473305" y="5684960"/>
-            <a:ext cx="321502" cy="321502"/>
+            <a:off x="3482449" y="5694104"/>
+            <a:ext cx="303214" cy="303214"/>
           </a:xfrm>
           <a:prstGeom prst="ellipse">
             <a:avLst/>
@@ -5791,14 +6204,14 @@
       </p:sp>
       <p:sp>
         <p:nvSpPr>
-          <p:cNvPr id="70" name="Oval 69"/>
+          <p:cNvPr id="79" name="Oval 78"/>
           <p:cNvSpPr/>
           <p:nvPr/>
         </p:nvSpPr>
         <p:spPr>
           <a:xfrm>
-            <a:off x="3423272" y="5784772"/>
-            <a:ext cx="144840" cy="144840"/>
+            <a:off x="3432416" y="5793916"/>
+            <a:ext cx="126552" cy="126552"/>
           </a:xfrm>
           <a:prstGeom prst="ellipse">
             <a:avLst/>
@@ -5837,14 +6250,14 @@
       </p:sp>
       <p:sp>
         <p:nvSpPr>
-          <p:cNvPr id="71" name="Oval 70"/>
+          <p:cNvPr id="80" name="Oval 79"/>
           <p:cNvSpPr/>
           <p:nvPr/>
         </p:nvSpPr>
         <p:spPr>
           <a:xfrm>
-            <a:off x="3541161" y="5722906"/>
-            <a:ext cx="282000" cy="282000"/>
+            <a:off x="3550305" y="5732050"/>
+            <a:ext cx="263712" cy="263712"/>
           </a:xfrm>
           <a:prstGeom prst="ellipse">
             <a:avLst/>
@@ -5883,14 +6296,14 @@
       </p:sp>
       <p:sp>
         <p:nvSpPr>
-          <p:cNvPr id="72" name="Oval 71"/>
+          <p:cNvPr id="81" name="Oval 80"/>
           <p:cNvSpPr/>
           <p:nvPr/>
         </p:nvSpPr>
         <p:spPr>
           <a:xfrm>
-            <a:off x="3594125" y="5762324"/>
-            <a:ext cx="234816" cy="234816"/>
+            <a:off x="3603269" y="5771468"/>
+            <a:ext cx="216528" cy="216528"/>
           </a:xfrm>
           <a:prstGeom prst="ellipse">
             <a:avLst/>
@@ -5929,14 +6342,14 @@
       </p:sp>
       <p:sp>
         <p:nvSpPr>
-          <p:cNvPr id="73" name="Oval 72"/>
+          <p:cNvPr id="82" name="Oval 81"/>
           <p:cNvSpPr/>
           <p:nvPr/>
         </p:nvSpPr>
         <p:spPr>
           <a:xfrm>
-            <a:off x="7678871" y="5756194"/>
-            <a:ext cx="272124" cy="272124"/>
+            <a:off x="7688015" y="5765338"/>
+            <a:ext cx="253836" cy="253836"/>
           </a:xfrm>
           <a:prstGeom prst="ellipse">
             <a:avLst/>
@@ -5975,14 +6388,14 @@
       </p:sp>
       <p:sp>
         <p:nvSpPr>
-          <p:cNvPr id="74" name="Oval 73"/>
+          <p:cNvPr id="83" name="Oval 82"/>
           <p:cNvSpPr/>
           <p:nvPr/>
         </p:nvSpPr>
         <p:spPr>
           <a:xfrm>
-            <a:off x="3638106" y="5736991"/>
-            <a:ext cx="310530" cy="310530"/>
+            <a:off x="3647250" y="5746135"/>
+            <a:ext cx="292242" cy="292242"/>
           </a:xfrm>
           <a:prstGeom prst="ellipse">
             <a:avLst/>
@@ -6021,14 +6434,14 @@
       </p:sp>
       <p:sp>
         <p:nvSpPr>
-          <p:cNvPr id="75" name="Oval 74"/>
+          <p:cNvPr id="84" name="Oval 83"/>
           <p:cNvSpPr/>
           <p:nvPr/>
         </p:nvSpPr>
         <p:spPr>
           <a:xfrm>
-            <a:off x="3675508" y="5761690"/>
-            <a:ext cx="266638" cy="266638"/>
+            <a:off x="3684652" y="5770834"/>
+            <a:ext cx="248350" cy="248350"/>
           </a:xfrm>
           <a:prstGeom prst="ellipse">
             <a:avLst/>
@@ -6067,14 +6480,14 @@
       </p:sp>
       <p:sp>
         <p:nvSpPr>
-          <p:cNvPr id="76" name="Oval 75"/>
+          <p:cNvPr id="85" name="Oval 84"/>
           <p:cNvSpPr/>
           <p:nvPr/>
         </p:nvSpPr>
         <p:spPr>
           <a:xfrm>
-            <a:off x="3676840" y="5734807"/>
-            <a:ext cx="320404" cy="320404"/>
+            <a:off x="3685984" y="5743951"/>
+            <a:ext cx="302116" cy="302116"/>
           </a:xfrm>
           <a:prstGeom prst="ellipse">
             <a:avLst/>
@@ -6113,14 +6526,14 @@
       </p:sp>
       <p:sp>
         <p:nvSpPr>
-          <p:cNvPr id="77" name="Oval 76"/>
+          <p:cNvPr id="86" name="Oval 85"/>
           <p:cNvSpPr/>
           <p:nvPr/>
         </p:nvSpPr>
         <p:spPr>
           <a:xfrm>
-            <a:off x="3866507" y="5840077"/>
-            <a:ext cx="147034" cy="147034"/>
+            <a:off x="3875651" y="5849221"/>
+            <a:ext cx="128746" cy="128746"/>
           </a:xfrm>
           <a:prstGeom prst="ellipse">
             <a:avLst/>
@@ -6159,14 +6572,14 @@
       </p:sp>
       <p:sp>
         <p:nvSpPr>
-          <p:cNvPr id="78" name="Oval 77"/>
+          <p:cNvPr id="87" name="Oval 86"/>
           <p:cNvSpPr/>
           <p:nvPr/>
         </p:nvSpPr>
         <p:spPr>
           <a:xfrm>
-            <a:off x="3784510" y="5767108"/>
-            <a:ext cx="292972" cy="292972"/>
+            <a:off x="3793654" y="5776252"/>
+            <a:ext cx="274684" cy="274684"/>
           </a:xfrm>
           <a:prstGeom prst="ellipse">
             <a:avLst/>
@@ -6205,14 +6618,14 @@
       </p:sp>
       <p:sp>
         <p:nvSpPr>
-          <p:cNvPr id="79" name="Oval 78"/>
+          <p:cNvPr id="88" name="Oval 87"/>
           <p:cNvSpPr/>
           <p:nvPr/>
         </p:nvSpPr>
         <p:spPr>
           <a:xfrm>
-            <a:off x="3894857" y="5826754"/>
-            <a:ext cx="184342" cy="184342"/>
+            <a:off x="3904001" y="5835898"/>
+            <a:ext cx="166054" cy="166054"/>
           </a:xfrm>
           <a:prstGeom prst="ellipse">
             <a:avLst/>
@@ -6251,14 +6664,14 @@
       </p:sp>
       <p:sp>
         <p:nvSpPr>
-          <p:cNvPr id="80" name="Oval 79"/>
+          <p:cNvPr id="89" name="Oval 88"/>
           <p:cNvSpPr/>
           <p:nvPr/>
         </p:nvSpPr>
         <p:spPr>
           <a:xfrm>
-            <a:off x="3887607" y="5811167"/>
-            <a:ext cx="217260" cy="217260"/>
+            <a:off x="3896751" y="5820311"/>
+            <a:ext cx="198972" cy="198972"/>
           </a:xfrm>
           <a:prstGeom prst="ellipse">
             <a:avLst/>
@@ -6297,14 +6710,14 @@
       </p:sp>
       <p:sp>
         <p:nvSpPr>
-          <p:cNvPr id="81" name="Oval 80"/>
+          <p:cNvPr id="90" name="Oval 89"/>
           <p:cNvSpPr/>
           <p:nvPr/>
         </p:nvSpPr>
         <p:spPr>
           <a:xfrm>
-            <a:off x="3991175" y="5844042"/>
-            <a:ext cx="161300" cy="161300"/>
+            <a:off x="4000319" y="5853186"/>
+            <a:ext cx="143012" cy="143012"/>
           </a:xfrm>
           <a:prstGeom prst="ellipse">
             <a:avLst/>
@@ -6343,14 +6756,14 @@
       </p:sp>
       <p:sp>
         <p:nvSpPr>
-          <p:cNvPr id="82" name="Oval 81"/>
+          <p:cNvPr id="91" name="Oval 90"/>
           <p:cNvSpPr/>
           <p:nvPr/>
         </p:nvSpPr>
         <p:spPr>
           <a:xfrm>
-            <a:off x="4043204" y="5826863"/>
-            <a:ext cx="216164" cy="216164"/>
+            <a:off x="4052348" y="5836007"/>
+            <a:ext cx="197876" cy="197876"/>
           </a:xfrm>
           <a:prstGeom prst="ellipse">
             <a:avLst/>
@@ -6389,14 +6802,14 @@
       </p:sp>
       <p:sp>
         <p:nvSpPr>
-          <p:cNvPr id="83" name="Oval 82"/>
+          <p:cNvPr id="92" name="Oval 91"/>
           <p:cNvSpPr/>
           <p:nvPr/>
         </p:nvSpPr>
         <p:spPr>
           <a:xfrm>
-            <a:off x="3957779" y="5779132"/>
-            <a:ext cx="311626" cy="311626"/>
+            <a:off x="3966923" y="5788276"/>
+            <a:ext cx="293338" cy="293338"/>
           </a:xfrm>
           <a:prstGeom prst="ellipse">
             <a:avLst/>
@@ -6435,14 +6848,14 @@
       </p:sp>
       <p:sp>
         <p:nvSpPr>
-          <p:cNvPr id="84" name="Oval 83"/>
+          <p:cNvPr id="93" name="Oval 92"/>
           <p:cNvSpPr/>
           <p:nvPr/>
         </p:nvSpPr>
         <p:spPr>
           <a:xfrm>
-            <a:off x="4179177" y="5862525"/>
-            <a:ext cx="144840" cy="144840"/>
+            <a:off x="4188321" y="5871669"/>
+            <a:ext cx="126552" cy="126552"/>
           </a:xfrm>
           <a:prstGeom prst="ellipse">
             <a:avLst/>
@@ -6481,14 +6894,14 @@
       </p:sp>
       <p:sp>
         <p:nvSpPr>
-          <p:cNvPr id="85" name="Oval 84"/>
+          <p:cNvPr id="94" name="Oval 93"/>
           <p:cNvSpPr/>
           <p:nvPr/>
         </p:nvSpPr>
         <p:spPr>
           <a:xfrm>
-            <a:off x="4238039" y="5862731"/>
-            <a:ext cx="152520" cy="152520"/>
+            <a:off x="4247183" y="5871875"/>
+            <a:ext cx="134232" cy="134232"/>
           </a:xfrm>
           <a:prstGeom prst="ellipse">
             <a:avLst/>
@@ -6527,14 +6940,14 @@
       </p:sp>
       <p:sp>
         <p:nvSpPr>
-          <p:cNvPr id="86" name="Oval 85"/>
+          <p:cNvPr id="95" name="Oval 94"/>
           <p:cNvSpPr/>
           <p:nvPr/>
         </p:nvSpPr>
         <p:spPr>
           <a:xfrm>
-            <a:off x="7294325" y="5830361"/>
-            <a:ext cx="217260" cy="217260"/>
+            <a:off x="7303469" y="5839505"/>
+            <a:ext cx="198972" cy="198972"/>
           </a:xfrm>
           <a:prstGeom prst="ellipse">
             <a:avLst/>
@@ -6573,14 +6986,14 @@
       </p:sp>
       <p:sp>
         <p:nvSpPr>
-          <p:cNvPr id="87" name="Oval 86"/>
+          <p:cNvPr id="96" name="Oval 95"/>
           <p:cNvSpPr/>
           <p:nvPr/>
         </p:nvSpPr>
         <p:spPr>
           <a:xfrm>
-            <a:off x="4118344" y="5806728"/>
-            <a:ext cx="268832" cy="268832"/>
+            <a:off x="4127488" y="5815872"/>
+            <a:ext cx="250544" cy="250544"/>
           </a:xfrm>
           <a:prstGeom prst="ellipse">
             <a:avLst/>
@@ -6619,14 +7032,14 @@
       </p:sp>
       <p:sp>
         <p:nvSpPr>
-          <p:cNvPr id="88" name="Oval 87"/>
+          <p:cNvPr id="97" name="Oval 96"/>
           <p:cNvSpPr/>
           <p:nvPr/>
         </p:nvSpPr>
         <p:spPr>
           <a:xfrm>
-            <a:off x="4209934" y="5832327"/>
-            <a:ext cx="219456" cy="219456"/>
+            <a:off x="4219078" y="5841471"/>
+            <a:ext cx="201168" cy="201168"/>
           </a:xfrm>
           <a:prstGeom prst="ellipse">
             <a:avLst/>
@@ -6665,14 +7078,14 @@
       </p:sp>
       <p:sp>
         <p:nvSpPr>
-          <p:cNvPr id="89" name="Oval 88"/>
+          <p:cNvPr id="98" name="Oval 97"/>
           <p:cNvSpPr/>
           <p:nvPr/>
         </p:nvSpPr>
         <p:spPr>
           <a:xfrm>
-            <a:off x="4161719" y="5783454"/>
-            <a:ext cx="319308" cy="319308"/>
+            <a:off x="4170863" y="5792598"/>
+            <a:ext cx="301020" cy="301020"/>
           </a:xfrm>
           <a:prstGeom prst="ellipse">
             <a:avLst/>
@@ -6711,14 +7124,14 @@
       </p:sp>
       <p:sp>
         <p:nvSpPr>
-          <p:cNvPr id="90" name="Oval 89"/>
+          <p:cNvPr id="99" name="Oval 98"/>
           <p:cNvSpPr/>
           <p:nvPr/>
         </p:nvSpPr>
         <p:spPr>
           <a:xfrm>
-            <a:off x="7046274" y="5849840"/>
-            <a:ext cx="186536" cy="186536"/>
+            <a:off x="7055418" y="5858984"/>
+            <a:ext cx="168248" cy="168248"/>
           </a:xfrm>
           <a:prstGeom prst="ellipse">
             <a:avLst/>
@@ -6757,14 +7170,14 @@
       </p:sp>
       <p:sp>
         <p:nvSpPr>
-          <p:cNvPr id="91" name="Oval 90"/>
+          <p:cNvPr id="100" name="Oval 99"/>
           <p:cNvSpPr/>
           <p:nvPr/>
         </p:nvSpPr>
         <p:spPr>
           <a:xfrm>
-            <a:off x="4273279" y="5808143"/>
-            <a:ext cx="269930" cy="269930"/>
+            <a:off x="4282423" y="5817287"/>
+            <a:ext cx="251642" cy="251642"/>
           </a:xfrm>
           <a:prstGeom prst="ellipse">
             <a:avLst/>
@@ -6803,14 +7216,14 @@
       </p:sp>
       <p:sp>
         <p:nvSpPr>
-          <p:cNvPr id="92" name="Oval 91"/>
+          <p:cNvPr id="101" name="Oval 100"/>
           <p:cNvSpPr/>
           <p:nvPr/>
         </p:nvSpPr>
         <p:spPr>
           <a:xfrm>
-            <a:off x="4257004" y="5778516"/>
-            <a:ext cx="329184" cy="329184"/>
+            <a:off x="4266148" y="5787660"/>
+            <a:ext cx="310896" cy="310896"/>
           </a:xfrm>
           <a:prstGeom prst="ellipse">
             <a:avLst/>
@@ -6849,14 +7262,14 @@
       </p:sp>
       <p:sp>
         <p:nvSpPr>
-          <p:cNvPr id="93" name="Oval 92"/>
+          <p:cNvPr id="102" name="Oval 101"/>
           <p:cNvSpPr/>
           <p:nvPr/>
         </p:nvSpPr>
         <p:spPr>
           <a:xfrm>
-            <a:off x="4481816" y="5835575"/>
-            <a:ext cx="215066" cy="215066"/>
+            <a:off x="4490960" y="5844719"/>
+            <a:ext cx="196778" cy="196778"/>
           </a:xfrm>
           <a:prstGeom prst="ellipse">
             <a:avLst/>
@@ -6895,14 +7308,14 @@
       </p:sp>
       <p:sp>
         <p:nvSpPr>
-          <p:cNvPr id="94" name="Oval 93"/>
+          <p:cNvPr id="103" name="Oval 102"/>
           <p:cNvSpPr/>
           <p:nvPr/>
         </p:nvSpPr>
         <p:spPr>
           <a:xfrm>
-            <a:off x="4516242" y="5835026"/>
-            <a:ext cx="216164" cy="216164"/>
+            <a:off x="4525386" y="5844170"/>
+            <a:ext cx="197876" cy="197876"/>
           </a:xfrm>
           <a:prstGeom prst="ellipse">
             <a:avLst/>
@@ -6941,14 +7354,14 @@
       </p:sp>
       <p:sp>
         <p:nvSpPr>
-          <p:cNvPr id="95" name="TextBox 94"/>
+          <p:cNvPr id="104" name="TextBox 103"/>
           <p:cNvSpPr txBox="1"/>
           <p:nvPr/>
         </p:nvSpPr>
         <p:spPr>
           <a:xfrm>
-            <a:off x="1371600" y="6263640"/>
-            <a:ext cx="10058400" cy="320040"/>
+            <a:off x="1371600" y="6291072"/>
+            <a:ext cx="10515600" cy="228600"/>
           </a:xfrm>
           <a:prstGeom prst="rect">
             <a:avLst/>
@@ -6970,7 +7383,7 @@
                 </a:solidFill>
                 <a:latin typeface="Arial"/>
               </a:rPr>
-              <a:t>Top positive: E2F_TARGETS, G2M_CHECKPOINT, MYC_TARGETS_V1/V2, mTORC1, MITOTIC_SPINDLE (good-enriched). Top negative: EPITHELIAL_MESENCHYMAL_TRANSITION, MYOGENESIS, APICAL_JUNCTION (bad-enriched).</a:t>
+              <a:t>Dot size ∝ gene-set size (leading-edge proxy). Gold ★ = top 5 positive (good-enriched) + top 3 negative (bad-enriched).</a:t>
             </a:r>
           </a:p>
         </p:txBody>
@@ -7060,7 +7473,7 @@
                 </a:solidFill>
                 <a:latin typeface="Arial"/>
               </a:rPr>
-              <a:t>Reactome GSEA — top 20 by |NES| (pre-CRT good vs bad)</a:t>
+              <a:t>Reactome GSEA — top 20 by |NES| (gold outline for cell-cycle / DNA-repair category)</a:t>
             </a:r>
           </a:p>
         </p:txBody>
@@ -7803,6 +8216,50 @@
         </p:nvSpPr>
         <p:spPr>
           <a:xfrm>
+            <a:off x="9769132" y="1445900"/>
+            <a:ext cx="253736" cy="253736"/>
+          </a:xfrm>
+          <a:prstGeom prst="ellipse">
+            <a:avLst/>
+          </a:prstGeom>
+          <a:noFill/>
+          <a:ln w="15240">
+            <a:solidFill>
+              <a:srgbClr val="D4A300"/>
+            </a:solidFill>
+          </a:ln>
+          <a:effectLst/>
+        </p:spPr>
+        <p:style>
+          <a:lnRef idx="1">
+            <a:schemeClr val="accent1"/>
+          </a:lnRef>
+          <a:fillRef idx="3">
+            <a:schemeClr val="accent1"/>
+          </a:fillRef>
+          <a:effectRef idx="2">
+            <a:schemeClr val="accent1"/>
+          </a:effectRef>
+          <a:fontRef idx="minor">
+            <a:schemeClr val="lt1"/>
+          </a:fontRef>
+        </p:style>
+        <p:txBody>
+          <a:bodyPr rtlCol="0" anchor="ctr"/>
+          <a:lstStyle/>
+          <a:p>
+            <a:pPr algn="ctr"/>
+          </a:p>
+        </p:txBody>
+      </p:sp>
+      <p:sp>
+        <p:nvSpPr>
+          <p:cNvPr id="25" name="Oval 24"/>
+          <p:cNvSpPr/>
+          <p:nvPr/>
+        </p:nvSpPr>
+        <p:spPr>
+          <a:xfrm>
             <a:off x="9805708" y="1482476"/>
             <a:ext cx="180584" cy="180584"/>
           </a:xfrm>
@@ -7843,7 +8300,7 @@
       </p:sp>
       <p:sp>
         <p:nvSpPr>
-          <p:cNvPr id="25" name="TextBox 24"/>
+          <p:cNvPr id="26" name="TextBox 25"/>
           <p:cNvSpPr txBox="1"/>
           <p:nvPr/>
         </p:nvSpPr>
@@ -7866,9 +8323,9 @@
           <a:p>
             <a:pPr algn="r"/>
             <a:r>
-              <a:rPr sz="600" b="0" i="0">
+              <a:rPr sz="600" b="1" i="0">
                 <a:solidFill>
-                  <a:srgbClr val="222222"/>
+                  <a:srgbClr val="D4A300"/>
                 </a:solidFill>
                 <a:latin typeface="Arial"/>
               </a:rPr>
@@ -7879,7 +8336,7 @@
       </p:sp>
       <p:cxnSp>
         <p:nvCxnSpPr>
-          <p:cNvPr id="26" name="Connector 25"/>
+          <p:cNvPr id="27" name="Connector 26"/>
           <p:cNvCxnSpPr/>
           <p:nvPr/>
         </p:nvCxnSpPr>
@@ -7915,7 +8372,7 @@
       </p:cxnSp>
       <p:sp>
         <p:nvSpPr>
-          <p:cNvPr id="27" name="Oval 26"/>
+          <p:cNvPr id="28" name="Oval 27"/>
           <p:cNvSpPr/>
           <p:nvPr/>
         </p:nvSpPr>
@@ -7961,7 +8418,7 @@
       </p:sp>
       <p:sp>
         <p:nvSpPr>
-          <p:cNvPr id="28" name="TextBox 27"/>
+          <p:cNvPr id="29" name="TextBox 28"/>
           <p:cNvSpPr txBox="1"/>
           <p:nvPr/>
         </p:nvSpPr>
@@ -7997,7 +8454,7 @@
       </p:sp>
       <p:cxnSp>
         <p:nvCxnSpPr>
-          <p:cNvPr id="29" name="Connector 28"/>
+          <p:cNvPr id="30" name="Connector 29"/>
           <p:cNvCxnSpPr/>
           <p:nvPr/>
         </p:nvCxnSpPr>
@@ -8033,7 +8490,7 @@
       </p:cxnSp>
       <p:sp>
         <p:nvSpPr>
-          <p:cNvPr id="30" name="Oval 29"/>
+          <p:cNvPr id="31" name="Oval 30"/>
           <p:cNvSpPr/>
           <p:nvPr/>
         </p:nvSpPr>
@@ -8079,7 +8536,7 @@
       </p:sp>
       <p:sp>
         <p:nvSpPr>
-          <p:cNvPr id="31" name="TextBox 30"/>
+          <p:cNvPr id="32" name="TextBox 31"/>
           <p:cNvSpPr txBox="1"/>
           <p:nvPr/>
         </p:nvSpPr>
@@ -8115,7 +8572,7 @@
       </p:sp>
       <p:cxnSp>
         <p:nvCxnSpPr>
-          <p:cNvPr id="32" name="Connector 31"/>
+          <p:cNvPr id="33" name="Connector 32"/>
           <p:cNvCxnSpPr/>
           <p:nvPr/>
         </p:nvCxnSpPr>
@@ -8151,7 +8608,7 @@
       </p:cxnSp>
       <p:sp>
         <p:nvSpPr>
-          <p:cNvPr id="33" name="Oval 32"/>
+          <p:cNvPr id="34" name="Oval 33"/>
           <p:cNvSpPr/>
           <p:nvPr/>
         </p:nvSpPr>
@@ -8197,7 +8654,7 @@
       </p:sp>
       <p:sp>
         <p:nvSpPr>
-          <p:cNvPr id="34" name="TextBox 33"/>
+          <p:cNvPr id="35" name="TextBox 34"/>
           <p:cNvSpPr txBox="1"/>
           <p:nvPr/>
         </p:nvSpPr>
@@ -8233,7 +8690,7 @@
       </p:sp>
       <p:cxnSp>
         <p:nvCxnSpPr>
-          <p:cNvPr id="35" name="Connector 34"/>
+          <p:cNvPr id="36" name="Connector 35"/>
           <p:cNvCxnSpPr/>
           <p:nvPr/>
         </p:nvCxnSpPr>
@@ -8269,7 +8726,7 @@
       </p:cxnSp>
       <p:sp>
         <p:nvSpPr>
-          <p:cNvPr id="36" name="Oval 35"/>
+          <p:cNvPr id="37" name="Oval 36"/>
           <p:cNvSpPr/>
           <p:nvPr/>
         </p:nvSpPr>
@@ -8315,7 +8772,7 @@
       </p:sp>
       <p:sp>
         <p:nvSpPr>
-          <p:cNvPr id="37" name="TextBox 36"/>
+          <p:cNvPr id="38" name="TextBox 37"/>
           <p:cNvSpPr txBox="1"/>
           <p:nvPr/>
         </p:nvSpPr>
@@ -8351,7 +8808,7 @@
       </p:sp>
       <p:cxnSp>
         <p:nvCxnSpPr>
-          <p:cNvPr id="38" name="Connector 37"/>
+          <p:cNvPr id="39" name="Connector 38"/>
           <p:cNvCxnSpPr/>
           <p:nvPr/>
         </p:nvCxnSpPr>
@@ -8387,7 +8844,7 @@
       </p:cxnSp>
       <p:sp>
         <p:nvSpPr>
-          <p:cNvPr id="39" name="Oval 38"/>
+          <p:cNvPr id="40" name="Oval 39"/>
           <p:cNvSpPr/>
           <p:nvPr/>
         </p:nvSpPr>
@@ -8433,7 +8890,7 @@
       </p:sp>
       <p:sp>
         <p:nvSpPr>
-          <p:cNvPr id="40" name="TextBox 39"/>
+          <p:cNvPr id="41" name="TextBox 40"/>
           <p:cNvSpPr txBox="1"/>
           <p:nvPr/>
         </p:nvSpPr>
@@ -8469,7 +8926,7 @@
       </p:sp>
       <p:cxnSp>
         <p:nvCxnSpPr>
-          <p:cNvPr id="41" name="Connector 40"/>
+          <p:cNvPr id="42" name="Connector 41"/>
           <p:cNvCxnSpPr/>
           <p:nvPr/>
         </p:nvCxnSpPr>
@@ -8505,7 +8962,51 @@
       </p:cxnSp>
       <p:sp>
         <p:nvSpPr>
-          <p:cNvPr id="42" name="Oval 41"/>
+          <p:cNvPr id="43" name="Oval 42"/>
+          <p:cNvSpPr/>
+          <p:nvPr/>
+        </p:nvSpPr>
+        <p:spPr>
+          <a:xfrm>
+            <a:off x="9814026" y="2982070"/>
+            <a:ext cx="253780" cy="253780"/>
+          </a:xfrm>
+          <a:prstGeom prst="ellipse">
+            <a:avLst/>
+          </a:prstGeom>
+          <a:noFill/>
+          <a:ln w="15240">
+            <a:solidFill>
+              <a:srgbClr val="D4A300"/>
+            </a:solidFill>
+          </a:ln>
+          <a:effectLst/>
+        </p:spPr>
+        <p:style>
+          <a:lnRef idx="1">
+            <a:schemeClr val="accent1"/>
+          </a:lnRef>
+          <a:fillRef idx="3">
+            <a:schemeClr val="accent1"/>
+          </a:fillRef>
+          <a:effectRef idx="2">
+            <a:schemeClr val="accent1"/>
+          </a:effectRef>
+          <a:fontRef idx="minor">
+            <a:schemeClr val="lt1"/>
+          </a:fontRef>
+        </p:style>
+        <p:txBody>
+          <a:bodyPr rtlCol="0" anchor="ctr"/>
+          <a:lstStyle/>
+          <a:p>
+            <a:pPr algn="ctr"/>
+          </a:p>
+        </p:txBody>
+      </p:sp>
+      <p:sp>
+        <p:nvSpPr>
+          <p:cNvPr id="44" name="Oval 43"/>
           <p:cNvSpPr/>
           <p:nvPr/>
         </p:nvSpPr>
@@ -8551,7 +9052,7 @@
       </p:sp>
       <p:sp>
         <p:nvSpPr>
-          <p:cNvPr id="43" name="TextBox 42"/>
+          <p:cNvPr id="45" name="TextBox 44"/>
           <p:cNvSpPr txBox="1"/>
           <p:nvPr/>
         </p:nvSpPr>
@@ -8574,9 +9075,9 @@
           <a:p>
             <a:pPr algn="r"/>
             <a:r>
-              <a:rPr sz="600" b="0" i="0">
+              <a:rPr sz="600" b="1" i="0">
                 <a:solidFill>
-                  <a:srgbClr val="222222"/>
+                  <a:srgbClr val="D4A300"/>
                 </a:solidFill>
                 <a:latin typeface="Arial"/>
               </a:rPr>
@@ -8587,7 +9088,7 @@
       </p:sp>
       <p:cxnSp>
         <p:nvCxnSpPr>
-          <p:cNvPr id="44" name="Connector 43"/>
+          <p:cNvPr id="46" name="Connector 45"/>
           <p:cNvCxnSpPr/>
           <p:nvPr/>
         </p:nvCxnSpPr>
@@ -8623,7 +9124,7 @@
       </p:cxnSp>
       <p:sp>
         <p:nvSpPr>
-          <p:cNvPr id="45" name="Oval 44"/>
+          <p:cNvPr id="47" name="Oval 46"/>
           <p:cNvSpPr/>
           <p:nvPr/>
         </p:nvSpPr>
@@ -8669,7 +9170,7 @@
       </p:sp>
       <p:sp>
         <p:nvSpPr>
-          <p:cNvPr id="46" name="TextBox 45"/>
+          <p:cNvPr id="48" name="TextBox 47"/>
           <p:cNvSpPr txBox="1"/>
           <p:nvPr/>
         </p:nvSpPr>
@@ -8705,7 +9206,7 @@
       </p:sp>
       <p:cxnSp>
         <p:nvCxnSpPr>
-          <p:cNvPr id="47" name="Connector 46"/>
+          <p:cNvPr id="49" name="Connector 48"/>
           <p:cNvCxnSpPr/>
           <p:nvPr/>
         </p:nvCxnSpPr>
@@ -8741,7 +9242,51 @@
       </p:cxnSp>
       <p:sp>
         <p:nvSpPr>
-          <p:cNvPr id="48" name="Oval 47"/>
+          <p:cNvPr id="50" name="Oval 49"/>
+          <p:cNvSpPr/>
+          <p:nvPr/>
+        </p:nvSpPr>
+        <p:spPr>
+          <a:xfrm>
+            <a:off x="9796935" y="3468962"/>
+            <a:ext cx="304124" cy="304124"/>
+          </a:xfrm>
+          <a:prstGeom prst="ellipse">
+            <a:avLst/>
+          </a:prstGeom>
+          <a:noFill/>
+          <a:ln w="15240">
+            <a:solidFill>
+              <a:srgbClr val="D4A300"/>
+            </a:solidFill>
+          </a:ln>
+          <a:effectLst/>
+        </p:spPr>
+        <p:style>
+          <a:lnRef idx="1">
+            <a:schemeClr val="accent1"/>
+          </a:lnRef>
+          <a:fillRef idx="3">
+            <a:schemeClr val="accent1"/>
+          </a:fillRef>
+          <a:effectRef idx="2">
+            <a:schemeClr val="accent1"/>
+          </a:effectRef>
+          <a:fontRef idx="minor">
+            <a:schemeClr val="lt1"/>
+          </a:fontRef>
+        </p:style>
+        <p:txBody>
+          <a:bodyPr rtlCol="0" anchor="ctr"/>
+          <a:lstStyle/>
+          <a:p>
+            <a:pPr algn="ctr"/>
+          </a:p>
+        </p:txBody>
+      </p:sp>
+      <p:sp>
+        <p:nvSpPr>
+          <p:cNvPr id="51" name="Oval 50"/>
           <p:cNvSpPr/>
           <p:nvPr/>
         </p:nvSpPr>
@@ -8787,7 +9332,7 @@
       </p:sp>
       <p:sp>
         <p:nvSpPr>
-          <p:cNvPr id="49" name="TextBox 48"/>
+          <p:cNvPr id="52" name="TextBox 51"/>
           <p:cNvSpPr txBox="1"/>
           <p:nvPr/>
         </p:nvSpPr>
@@ -8810,9 +9355,9 @@
           <a:p>
             <a:pPr algn="r"/>
             <a:r>
-              <a:rPr sz="600" b="0" i="0">
+              <a:rPr sz="600" b="1" i="0">
                 <a:solidFill>
-                  <a:srgbClr val="222222"/>
+                  <a:srgbClr val="D4A300"/>
                 </a:solidFill>
                 <a:latin typeface="Arial"/>
               </a:rPr>
@@ -8823,7 +9368,7 @@
       </p:sp>
       <p:cxnSp>
         <p:nvCxnSpPr>
-          <p:cNvPr id="50" name="Connector 49"/>
+          <p:cNvPr id="53" name="Connector 52"/>
           <p:cNvCxnSpPr/>
           <p:nvPr/>
         </p:nvCxnSpPr>
@@ -8859,7 +9404,7 @@
       </p:cxnSp>
       <p:sp>
         <p:nvSpPr>
-          <p:cNvPr id="51" name="Oval 50"/>
+          <p:cNvPr id="54" name="Oval 53"/>
           <p:cNvSpPr/>
           <p:nvPr/>
         </p:nvSpPr>
@@ -8905,7 +9450,7 @@
       </p:sp>
       <p:sp>
         <p:nvSpPr>
-          <p:cNvPr id="52" name="TextBox 51"/>
+          <p:cNvPr id="55" name="TextBox 54"/>
           <p:cNvSpPr txBox="1"/>
           <p:nvPr/>
         </p:nvSpPr>
@@ -8941,7 +9486,7 @@
       </p:sp>
       <p:cxnSp>
         <p:nvCxnSpPr>
-          <p:cNvPr id="53" name="Connector 52"/>
+          <p:cNvPr id="56" name="Connector 55"/>
           <p:cNvCxnSpPr/>
           <p:nvPr/>
         </p:nvCxnSpPr>
@@ -8977,7 +9522,7 @@
       </p:cxnSp>
       <p:sp>
         <p:nvSpPr>
-          <p:cNvPr id="54" name="Oval 53"/>
+          <p:cNvPr id="57" name="Oval 56"/>
           <p:cNvSpPr/>
           <p:nvPr/>
         </p:nvSpPr>
@@ -9023,7 +9568,7 @@
       </p:sp>
       <p:sp>
         <p:nvSpPr>
-          <p:cNvPr id="55" name="TextBox 54"/>
+          <p:cNvPr id="58" name="TextBox 57"/>
           <p:cNvSpPr txBox="1"/>
           <p:nvPr/>
         </p:nvSpPr>
@@ -9059,7 +9604,7 @@
       </p:sp>
       <p:cxnSp>
         <p:nvCxnSpPr>
-          <p:cNvPr id="56" name="Connector 55"/>
+          <p:cNvPr id="59" name="Connector 58"/>
           <p:cNvCxnSpPr/>
           <p:nvPr/>
         </p:nvCxnSpPr>
@@ -9095,7 +9640,51 @@
       </p:cxnSp>
       <p:sp>
         <p:nvSpPr>
-          <p:cNvPr id="57" name="Oval 56"/>
+          <p:cNvPr id="60" name="Oval 59"/>
+          <p:cNvSpPr/>
+          <p:nvPr/>
+        </p:nvSpPr>
+        <p:spPr>
+          <a:xfrm>
+            <a:off x="9778460" y="4208402"/>
+            <a:ext cx="361436" cy="361436"/>
+          </a:xfrm>
+          <a:prstGeom prst="ellipse">
+            <a:avLst/>
+          </a:prstGeom>
+          <a:noFill/>
+          <a:ln w="15240">
+            <a:solidFill>
+              <a:srgbClr val="D4A300"/>
+            </a:solidFill>
+          </a:ln>
+          <a:effectLst/>
+        </p:spPr>
+        <p:style>
+          <a:lnRef idx="1">
+            <a:schemeClr val="accent1"/>
+          </a:lnRef>
+          <a:fillRef idx="3">
+            <a:schemeClr val="accent1"/>
+          </a:fillRef>
+          <a:effectRef idx="2">
+            <a:schemeClr val="accent1"/>
+          </a:effectRef>
+          <a:fontRef idx="minor">
+            <a:schemeClr val="lt1"/>
+          </a:fontRef>
+        </p:style>
+        <p:txBody>
+          <a:bodyPr rtlCol="0" anchor="ctr"/>
+          <a:lstStyle/>
+          <a:p>
+            <a:pPr algn="ctr"/>
+          </a:p>
+        </p:txBody>
+      </p:sp>
+      <p:sp>
+        <p:nvSpPr>
+          <p:cNvPr id="61" name="Oval 60"/>
           <p:cNvSpPr/>
           <p:nvPr/>
         </p:nvSpPr>
@@ -9141,7 +9730,7 @@
       </p:sp>
       <p:sp>
         <p:nvSpPr>
-          <p:cNvPr id="58" name="TextBox 57"/>
+          <p:cNvPr id="62" name="TextBox 61"/>
           <p:cNvSpPr txBox="1"/>
           <p:nvPr/>
         </p:nvSpPr>
@@ -9164,9 +9753,9 @@
           <a:p>
             <a:pPr algn="r"/>
             <a:r>
-              <a:rPr sz="600" b="0" i="0">
+              <a:rPr sz="600" b="1" i="0">
                 <a:solidFill>
-                  <a:srgbClr val="222222"/>
+                  <a:srgbClr val="D4A300"/>
                 </a:solidFill>
                 <a:latin typeface="Arial"/>
               </a:rPr>
@@ -9177,7 +9766,7 @@
       </p:sp>
       <p:cxnSp>
         <p:nvCxnSpPr>
-          <p:cNvPr id="59" name="Connector 58"/>
+          <p:cNvPr id="63" name="Connector 62"/>
           <p:cNvCxnSpPr/>
           <p:nvPr/>
         </p:nvCxnSpPr>
@@ -9213,7 +9802,7 @@
       </p:cxnSp>
       <p:sp>
         <p:nvSpPr>
-          <p:cNvPr id="60" name="Oval 59"/>
+          <p:cNvPr id="64" name="Oval 63"/>
           <p:cNvSpPr/>
           <p:nvPr/>
         </p:nvSpPr>
@@ -9259,7 +9848,7 @@
       </p:sp>
       <p:sp>
         <p:nvSpPr>
-          <p:cNvPr id="61" name="TextBox 60"/>
+          <p:cNvPr id="65" name="TextBox 64"/>
           <p:cNvSpPr txBox="1"/>
           <p:nvPr/>
         </p:nvSpPr>
@@ -9295,7 +9884,7 @@
       </p:sp>
       <p:cxnSp>
         <p:nvCxnSpPr>
-          <p:cNvPr id="62" name="Connector 61"/>
+          <p:cNvPr id="66" name="Connector 65"/>
           <p:cNvCxnSpPr/>
           <p:nvPr/>
         </p:nvCxnSpPr>
@@ -9331,7 +9920,7 @@
       </p:cxnSp>
       <p:sp>
         <p:nvSpPr>
-          <p:cNvPr id="63" name="Oval 62"/>
+          <p:cNvPr id="67" name="Oval 66"/>
           <p:cNvSpPr/>
           <p:nvPr/>
         </p:nvSpPr>
@@ -9377,7 +9966,7 @@
       </p:sp>
       <p:sp>
         <p:nvSpPr>
-          <p:cNvPr id="64" name="TextBox 63"/>
+          <p:cNvPr id="68" name="TextBox 67"/>
           <p:cNvSpPr txBox="1"/>
           <p:nvPr/>
         </p:nvSpPr>
@@ -9413,7 +10002,7 @@
       </p:sp>
       <p:cxnSp>
         <p:nvCxnSpPr>
-          <p:cNvPr id="65" name="Connector 64"/>
+          <p:cNvPr id="69" name="Connector 68"/>
           <p:cNvCxnSpPr/>
           <p:nvPr/>
         </p:nvCxnSpPr>
@@ -9449,7 +10038,7 @@
       </p:cxnSp>
       <p:sp>
         <p:nvSpPr>
-          <p:cNvPr id="66" name="Oval 65"/>
+          <p:cNvPr id="70" name="Oval 69"/>
           <p:cNvSpPr/>
           <p:nvPr/>
         </p:nvSpPr>
@@ -9495,7 +10084,7 @@
       </p:sp>
       <p:sp>
         <p:nvSpPr>
-          <p:cNvPr id="67" name="TextBox 66"/>
+          <p:cNvPr id="71" name="TextBox 70"/>
           <p:cNvSpPr txBox="1"/>
           <p:nvPr/>
         </p:nvSpPr>
@@ -9531,7 +10120,7 @@
       </p:sp>
       <p:cxnSp>
         <p:nvCxnSpPr>
-          <p:cNvPr id="68" name="Connector 67"/>
+          <p:cNvPr id="72" name="Connector 71"/>
           <p:cNvCxnSpPr/>
           <p:nvPr/>
         </p:nvCxnSpPr>
@@ -9567,7 +10156,7 @@
       </p:cxnSp>
       <p:sp>
         <p:nvSpPr>
-          <p:cNvPr id="69" name="Oval 68"/>
+          <p:cNvPr id="73" name="Oval 72"/>
           <p:cNvSpPr/>
           <p:nvPr/>
         </p:nvSpPr>
@@ -9613,7 +10202,7 @@
       </p:sp>
       <p:sp>
         <p:nvSpPr>
-          <p:cNvPr id="70" name="TextBox 69"/>
+          <p:cNvPr id="74" name="TextBox 73"/>
           <p:cNvSpPr txBox="1"/>
           <p:nvPr/>
         </p:nvSpPr>
@@ -9649,7 +10238,7 @@
       </p:sp>
       <p:cxnSp>
         <p:nvCxnSpPr>
-          <p:cNvPr id="71" name="Connector 70"/>
+          <p:cNvPr id="75" name="Connector 74"/>
           <p:cNvCxnSpPr/>
           <p:nvPr/>
         </p:nvCxnSpPr>
@@ -9685,7 +10274,7 @@
       </p:cxnSp>
       <p:sp>
         <p:nvSpPr>
-          <p:cNvPr id="72" name="Oval 71"/>
+          <p:cNvPr id="76" name="Oval 75"/>
           <p:cNvSpPr/>
           <p:nvPr/>
         </p:nvSpPr>
@@ -9731,7 +10320,7 @@
       </p:sp>
       <p:sp>
         <p:nvSpPr>
-          <p:cNvPr id="73" name="TextBox 72"/>
+          <p:cNvPr id="77" name="TextBox 76"/>
           <p:cNvSpPr txBox="1"/>
           <p:nvPr/>
         </p:nvSpPr>
@@ -9767,7 +10356,7 @@
       </p:sp>
       <p:cxnSp>
         <p:nvCxnSpPr>
-          <p:cNvPr id="74" name="Connector 73"/>
+          <p:cNvPr id="78" name="Connector 77"/>
           <p:cNvCxnSpPr/>
           <p:nvPr/>
         </p:nvCxnSpPr>
@@ -9803,7 +10392,51 @@
       </p:cxnSp>
       <p:sp>
         <p:nvSpPr>
-          <p:cNvPr id="75" name="Oval 74"/>
+          <p:cNvPr id="79" name="Oval 78"/>
+          <p:cNvSpPr/>
+          <p:nvPr/>
+        </p:nvSpPr>
+        <p:spPr>
+          <a:xfrm>
+            <a:off x="9889648" y="5764227"/>
+            <a:ext cx="322170" cy="322170"/>
+          </a:xfrm>
+          <a:prstGeom prst="ellipse">
+            <a:avLst/>
+          </a:prstGeom>
+          <a:noFill/>
+          <a:ln w="15240">
+            <a:solidFill>
+              <a:srgbClr val="D4A300"/>
+            </a:solidFill>
+          </a:ln>
+          <a:effectLst/>
+        </p:spPr>
+        <p:style>
+          <a:lnRef idx="1">
+            <a:schemeClr val="accent1"/>
+          </a:lnRef>
+          <a:fillRef idx="3">
+            <a:schemeClr val="accent1"/>
+          </a:fillRef>
+          <a:effectRef idx="2">
+            <a:schemeClr val="accent1"/>
+          </a:effectRef>
+          <a:fontRef idx="minor">
+            <a:schemeClr val="lt1"/>
+          </a:fontRef>
+        </p:style>
+        <p:txBody>
+          <a:bodyPr rtlCol="0" anchor="ctr"/>
+          <a:lstStyle/>
+          <a:p>
+            <a:pPr algn="ctr"/>
+          </a:p>
+        </p:txBody>
+      </p:sp>
+      <p:sp>
+        <p:nvSpPr>
+          <p:cNvPr id="80" name="Oval 79"/>
           <p:cNvSpPr/>
           <p:nvPr/>
         </p:nvSpPr>
@@ -9849,7 +10482,7 @@
       </p:sp>
       <p:sp>
         <p:nvSpPr>
-          <p:cNvPr id="76" name="TextBox 75"/>
+          <p:cNvPr id="81" name="TextBox 80"/>
           <p:cNvSpPr txBox="1"/>
           <p:nvPr/>
         </p:nvSpPr>
@@ -9872,9 +10505,9 @@
           <a:p>
             <a:pPr algn="r"/>
             <a:r>
-              <a:rPr sz="600" b="0" i="0">
+              <a:rPr sz="600" b="1" i="0">
                 <a:solidFill>
-                  <a:srgbClr val="222222"/>
+                  <a:srgbClr val="D4A300"/>
                 </a:solidFill>
                 <a:latin typeface="Arial"/>
               </a:rPr>
@@ -9885,7 +10518,7 @@
       </p:sp>
       <p:cxnSp>
         <p:nvCxnSpPr>
-          <p:cNvPr id="77" name="Connector 76"/>
+          <p:cNvPr id="82" name="Connector 81"/>
           <p:cNvCxnSpPr/>
           <p:nvPr/>
         </p:nvCxnSpPr>
@@ -9921,7 +10554,7 @@
       </p:cxnSp>
       <p:sp>
         <p:nvSpPr>
-          <p:cNvPr id="78" name="Oval 77"/>
+          <p:cNvPr id="83" name="Oval 82"/>
           <p:cNvSpPr/>
           <p:nvPr/>
         </p:nvSpPr>
@@ -9967,7 +10600,7 @@
       </p:sp>
       <p:sp>
         <p:nvSpPr>
-          <p:cNvPr id="79" name="TextBox 78"/>
+          <p:cNvPr id="84" name="TextBox 83"/>
           <p:cNvSpPr txBox="1"/>
           <p:nvPr/>
         </p:nvSpPr>
@@ -9997,6 +10630,83 @@
                 <a:latin typeface="Arial"/>
               </a:rPr>
               <a:t>REACTOME_FCGR_ACTIVATION</a:t>
+            </a:r>
+          </a:p>
+        </p:txBody>
+      </p:sp>
+      <p:sp>
+        <p:nvSpPr>
+          <p:cNvPr id="85" name="TextBox 84"/>
+          <p:cNvSpPr txBox="1"/>
+          <p:nvPr/>
+        </p:nvSpPr>
+        <p:spPr>
+          <a:xfrm>
+            <a:off x="457200" y="1188720"/>
+            <a:ext cx="3474720" cy="228600"/>
+          </a:xfrm>
+          <a:prstGeom prst="rect">
+            <a:avLst/>
+          </a:prstGeom>
+          <a:noFill/>
+          <a:effectLst/>
+        </p:spPr>
+        <p:txBody>
+          <a:bodyPr wrap="square" lIns="0" rIns="0" tIns="0" bIns="0" anchor="ctr">
+            <a:spAutoFit/>
+          </a:bodyPr>
+          <a:lstStyle/>
+          <a:p>
+            <a:pPr algn="l"/>
+            <a:r>
+              <a:rPr sz="1100" b="1" i="0">
+                <a:solidFill>
+                  <a:srgbClr val="D4A300"/>
+                </a:solidFill>
+                <a:latin typeface="Arial"/>
+              </a:rPr>
+              <a:t>Thread-1 biology emphasis</a:t>
+            </a:r>
+          </a:p>
+        </p:txBody>
+      </p:sp>
+      <p:sp>
+        <p:nvSpPr>
+          <p:cNvPr id="86" name="TextBox 85"/>
+          <p:cNvSpPr txBox="1"/>
+          <p:nvPr/>
+        </p:nvSpPr>
+        <p:spPr>
+          <a:xfrm>
+            <a:off x="457200" y="1463040"/>
+            <a:ext cx="3474720" cy="1371600"/>
+          </a:xfrm>
+          <a:prstGeom prst="rect">
+            <a:avLst/>
+          </a:prstGeom>
+          <a:noFill/>
+          <a:effectLst/>
+        </p:spPr>
+        <p:txBody>
+          <a:bodyPr wrap="square" lIns="0" rIns="0" tIns="0" bIns="0" anchor="t">
+            <a:spAutoFit/>
+          </a:bodyPr>
+          <a:lstStyle/>
+          <a:p>
+            <a:pPr algn="l"/>
+            <a:r>
+              <a:rPr sz="900" b="0" i="0">
+                <a:solidFill>
+                  <a:srgbClr val="222222"/>
+                </a:solidFill>
+                <a:latin typeface="Arial"/>
+              </a:rPr>
+              <a:t>Gold-ringed dots = DNA-repair /
+cell-cycle / E2F / MYC / replication
+Reactome sets (the externally-
+validated Thread-1 axis).
+Line length ∝ |NES|.
+Dot size ∝ −log10(FDR).</a:t>
             </a:r>
           </a:p>
         </p:txBody>
